--- a/en/slides/07-Computer_Architecture-Verm1_Part_1-Code.pptx
+++ b/en/slides/07-Computer_Architecture-Verm1_Part_1-Code.pptx
@@ -124,27 +124,39 @@
   <p:extLst>
     <p:ext uri="{521415D9-36F7-43E2-AB2F-B90AF26B5E84}">
       <p14:sectionLst xmlns:p14="http://schemas.microsoft.com/office/powerpoint/2010/main">
-        <p14:section name="Opening" id="{bab7fd18-f9c9-906c-4183-4d3822c973e3}">
+        <p14:section name="Opening" id="{a4110d10-109f-5e61-e800-8a5dbf3e61f2}">
           <p14:sldIdLst>
             <p14:sldId id="256"/>
             <p14:sldId id="257"/>
           </p14:sldIdLst>
         </p14:section>
-        <p14:section name="The listings" id="{683720a6-b605-a19c-e9e3-3c582c3d3e8f}">
+        <p14:section name="Step 0: the working loop" id="{6cdc6925-9981-76d5-e1ac-72ef132183ee}">
           <p14:sldIdLst>
             <p14:sldId id="258"/>
             <p14:sldId id="259"/>
+          </p14:sldIdLst>
+        </p14:section>
+        <p14:section name="Step 2: a grid and a head" id="{099f9210-96df-b7ce-cfcb-888112b4b2be}">
+          <p14:sldIdLst>
             <p14:sldId id="260"/>
             <p14:sldId id="261"/>
             <p14:sldId id="262"/>
             <p14:sldId id="263"/>
             <p14:sldId id="264"/>
+          </p14:sldIdLst>
+        </p14:section>
+        <p14:section name="Step 3: movement" id="{6f3577a6-c02f-be5f-fcf6-1f7fae91e3d6}">
+          <p14:sldIdLst>
             <p14:sldId id="265"/>
             <p14:sldId id="266"/>
+          </p14:sldIdLst>
+        </p14:section>
+        <p14:section name="Step 4: look inside with PRG32-QT" id="{09e131fd-c543-34d5-090c-2ab15a9a892f}">
+          <p14:sldIdLst>
             <p14:sldId id="267"/>
           </p14:sldIdLst>
         </p14:section>
-        <p14:section name="Run it and test it" id="{efaff483-8f8b-2844-ef45-1eb993d7a936}">
+        <p14:section name="Run it and test it" id="{717feca1-ad6e-4be7-36b0-7b022f972139}">
           <p14:sldIdLst>
             <p14:sldId id="268"/>
             <p14:sldId id="269"/>
@@ -153,7 +165,7 @@
             <p14:sldId id="272"/>
           </p14:sldIdLst>
         </p14:section>
-        <p14:section name="Exercises" id="{a684e7b7-128e-90fc-83e5-dec2657fb14f}">
+        <p14:section name="Exercises" id="{e8e93ec1-8fb6-7fbe-008b-9383fe9067ee}">
           <p14:sldIdLst>
             <p14:sldId id="273"/>
           </p14:sldIdLst>
@@ -3087,7 +3099,63 @@
       </p:sp>
       <p:sp>
         <p:nvSpPr>
-          <p:cNvPr id="12" name="Shape 10"/>
+          <p:cNvPr id="12" name="Text 10"/>
+          <p:cNvSpPr txBox="1"/>
+          <p:nvPr/>
+        </p:nvSpPr>
+        <p:spPr>
+          <a:xfrm>
+            <a:off x="4693615" y="566928"/>
+            <a:ext cx="6949440" cy="640080"/>
+          </a:xfrm>
+          <a:prstGeom prst="rect">
+            <a:avLst/>
+          </a:prstGeom>
+          <a:noFill/>
+          <a:ln/>
+        </p:spPr>
+        <p:txBody>
+          <a:bodyPr wrap="square" lIns="0" tIns="0" rIns="0" bIns="0" rtlCol="0" anchor="t"/>
+          <a:lstStyle/>
+          <a:p>
+            <a:pPr algn="r" indent="0" marL="0">
+              <a:buNone/>
+            </a:pPr>
+            <a:r>
+              <a:rPr lang="en-US" sz="1300" dirty="0">
+                <a:solidFill>
+                  <a:srgbClr val="CFE3EA"/>
+                </a:solidFill>
+                <a:latin typeface="Calibri" pitchFamily="34" charset="0"/>
+                <a:ea typeface="Calibri" pitchFamily="34" charset="-122"/>
+                <a:cs typeface="Calibri" pitchFamily="34" charset="-120"/>
+              </a:rPr>
+              <a:t>Code deck. The concepts, the figures and the questions are in the lecture deck:</a:t>
+            </a:r>
+            <a:endParaRPr lang="en-US" sz="1300" dirty="0"/>
+          </a:p>
+          <a:p>
+            <a:pPr algn="r" indent="0" marL="0">
+              <a:buNone/>
+            </a:pPr>
+            <a:r>
+              <a:rPr lang="en-US" sz="1300" dirty="0">
+                <a:solidFill>
+                  <a:srgbClr val="CFE3EA"/>
+                </a:solidFill>
+                <a:latin typeface="Calibri" pitchFamily="34" charset="0"/>
+                <a:ea typeface="Calibri" pitchFamily="34" charset="-122"/>
+                <a:cs typeface="Calibri" pitchFamily="34" charset="-120"/>
+              </a:rPr>
+              <a:t>07-Computer_Architecture-Verm1_Part_1.pptx</a:t>
+            </a:r>
+            <a:endParaRPr lang="en-US" sz="1300" dirty="0"/>
+          </a:p>
+        </p:txBody>
+      </p:sp>
+      <p:sp>
+        <p:nvSpPr>
+          <p:cNvPr id="13" name="Shape 11"/>
           <p:cNvSpPr/>
           <p:nvPr/>
         </p:nvSpPr>
@@ -3114,7 +3182,7 @@
       </p:sp>
       <p:pic>
         <p:nvPicPr>
-          <p:cNvPr id="13" name="Image 0" descr="/Users/raffaelemontella/devel/riscv-prg32/computer-architecture-with-prg32/tools/assets/verm1_p1.png">    </p:cNvPr>
+          <p:cNvPr id="14" name="Image 0" descr="/Users/raffaelemontella/devel/riscv-prg32/computer-architecture-with-prg32/tools/assets/verm1_p1.png">    </p:cNvPr>
           <p:cNvPicPr>
             <a:picLocks noChangeAspect="1"/>
           </p:cNvPicPr>

--- a/en/slides/07-Computer_Architecture-Verm1_Part_1-Code.pptx
+++ b/en/slides/07-Computer_Architecture-Verm1_Part_1-Code.pptx
@@ -124,19 +124,19 @@
   <p:extLst>
     <p:ext uri="{521415D9-36F7-43E2-AB2F-B90AF26B5E84}">
       <p14:sectionLst xmlns:p14="http://schemas.microsoft.com/office/powerpoint/2010/main">
-        <p14:section name="Opening" id="{a4110d10-109f-5e61-e800-8a5dbf3e61f2}">
+        <p14:section name="Opening" id="{1debacec-33b0-409e-e8a7-a83894af8846}">
           <p14:sldIdLst>
             <p14:sldId id="256"/>
             <p14:sldId id="257"/>
           </p14:sldIdLst>
         </p14:section>
-        <p14:section name="Step 0: the working loop" id="{6cdc6925-9981-76d5-e1ac-72ef132183ee}">
+        <p14:section name="Step 0: the working loop" id="{4ada3058-22fd-5eb1-748c-c0388aea1be0}">
           <p14:sldIdLst>
             <p14:sldId id="258"/>
             <p14:sldId id="259"/>
           </p14:sldIdLst>
         </p14:section>
-        <p14:section name="Step 2: a grid and a head" id="{099f9210-96df-b7ce-cfcb-888112b4b2be}">
+        <p14:section name="Step 2: a grid and a head" id="{99678840-ef0c-5bc5-a2dd-d1a3f4458363}">
           <p14:sldIdLst>
             <p14:sldId id="260"/>
             <p14:sldId id="261"/>
@@ -145,18 +145,18 @@
             <p14:sldId id="264"/>
           </p14:sldIdLst>
         </p14:section>
-        <p14:section name="Step 3: movement" id="{6f3577a6-c02f-be5f-fcf6-1f7fae91e3d6}">
+        <p14:section name="Step 3: movement" id="{b302ed3a-2b3f-3333-e8e0-4840bd21e721}">
           <p14:sldIdLst>
             <p14:sldId id="265"/>
             <p14:sldId id="266"/>
           </p14:sldIdLst>
         </p14:section>
-        <p14:section name="Step 4: look inside with PRG32-QT" id="{09e131fd-c543-34d5-090c-2ab15a9a892f}">
+        <p14:section name="Step 4: look inside with PRG32-QT" id="{1bc8a331-ab04-860a-df30-d5e6be925477}">
           <p14:sldIdLst>
             <p14:sldId id="267"/>
           </p14:sldIdLst>
         </p14:section>
-        <p14:section name="Run it and test it" id="{717feca1-ad6e-4be7-36b0-7b022f972139}">
+        <p14:section name="Run it and test it" id="{00e009f0-8a27-f5b5-ddf0-a21169fbe66f}">
           <p14:sldIdLst>
             <p14:sldId id="268"/>
             <p14:sldId id="269"/>
@@ -165,7 +165,7 @@
             <p14:sldId id="272"/>
           </p14:sldIdLst>
         </p14:section>
-        <p14:section name="Exercises" id="{e8e93ec1-8fb6-7fbe-008b-9383fe9067ee}">
+        <p14:section name="Exercises" id="{cfada311-0664-2497-283e-16adf5735ce4}">
           <p14:sldIdLst>
             <p14:sldId id="273"/>
           </p14:sldIdLst>
@@ -574,7 +574,9 @@
           <a:p>
             <a:r>
               <a:rPr lang="en-US" dirty="0"/>
-              <a:t>This is the code deck of Lecture 07. The lecture deck holds the concepts; this one holds everything you type and run: the listings with their explanation, the complete program, what it shows, and the way to test it on each of the three hosts.</a:t>
+              <a:t>This is the code deck of Lecture 07. The lecture deck holds the concepts; this one holds everything you type and run: the listings with their explanation, the complete program, what it shows, and the way to test it on each of the three hosts.
+Learning status: UNDERSTAND NOW, by the end of this lecture you explain it, trace it and apply it on your own; USE NOW, you follow and use the recipe today; how it works inside is explained later, or is not part of the course; UNDERSTAND LATER, recognise the name and what it is for; a later lecture explains it. A slide without a badge is context: a story, an example, a question, an exercise.
+Learning status of this lecture. UNDERSTAND NOW: the Verm1 project; the init, update, draw contract; a colour is a number; arrays in memory; .text, .rodata, .data; address, value, load, store; why ra is saved; shifts as multiplications; fixed point; pseudo-instructions; little-endian byte order. USE NOW: the PRG32 tools, the PRG32-QT debugger (used, not studied, in this course). UNDERSTAND LATER: instruction formats (Lecture 19). A slide without a badge is context: a story, an example, a question, an exercise.</a:t>
             </a:r>
             <a:endParaRPr lang="en-US" dirty="0"/>
           </a:p>
@@ -663,6 +665,7 @@
             <a:r>
               <a:rPr lang="en-US" dirty="0"/>
               <a:t>Read verm1_update in two halves. First the timer: load step_q8, add the speed, compare with 256. If it is less, jump to label 2, store the fraction and return: nothing moves in this frame. Otherwise subtract 256, keeping the remainder, and store it. Then the step: load head_x, add 1, compare with COLS; if the column has reached 40 it becomes 0, and the head comes back from the left. The labels 1: and 2: are local labels: 1f means "the next label 1 forward".
+UNDERSTAND NOW: fixed point.
 For the lecturer: blt compares signed numbers, which is right here: every value is small and positive. Local labels 1: and 2: are referred to as 1f and 2f, 'the next 1 or 2 forward'.</a:t>
             </a:r>
             <a:endParaRPr lang="en-US" dirty="0"/>
@@ -841,6 +844,7 @@
             <a:r>
               <a:rPr lang="en-US" dirty="0"/>
               <a:t>The debugger does not show your source: it shows what the assembler produced. Names have disappeared: labels have become addresses and SPEED_Q8 has become the number 40. Pseudo-instructions are expanded: la is auipc followed by addi, li is an addi from zero, ret is a jump to ra. Some instructions begin with c.: they are the compressed, 16-bit forms of the same instructions, the C in RV32IMAC. Recognising your own program in this listing is a skill that grows with practice.
+UNDERSTAND NOW: pseudo-instructions. UNDERSTAND LATER: instruction formats (studied in Lecture 19).
 For the lecturer: Disassembly of verm1_update from verm1/verm1_part1.S (objdump, rv32imac), abridged; the exact offsets depend on the build. Instruction formats and compressed instructions are the subject of Lecture 19.</a:t>
             </a:r>
             <a:endParaRPr lang="en-US" dirty="0"/>
@@ -1019,6 +1023,7 @@
             <a:r>
               <a:rPr lang="en-US" dirty="0"/>
               <a:t>The quickest way: PRG32-QT on your own computer. Four steps, each with its command. PRG32-QT behaves like a board on port 8080, which is why the upload command says esp32c6. With debug mode enabled you can stop at any instruction and read registers and memory.
+USE NOW: the PRG32 tools (used, not studied, in this course).
 For the lecturer: Run by the tests: the cartridge of this slide is built with this command and executed on the headless runner of PRG32-QT. Without the toolchain: import the .prg32 file in PRG32-QT and choose Run Cartridge. Keys: arrows or WASD for the joystick, Z or J for A, X or K for B, Enter for Start, Escape to go back to Setup.</a:t>
             </a:r>
             <a:endParaRPr lang="en-US" dirty="0"/>
@@ -1108,6 +1113,7 @@
             <a:r>
               <a:rPr lang="en-US" dirty="0"/>
               <a:t>The same program on the emulator. QEMU runs the real firmware on an emulated chip, so the cartridge must be built for the architecture qemu. Stage the cartridge while QEMU is closed. The firmware opens on the Setup menu: choose Run Cartridge and the slot. Remember that the keyboard is read by the terminal, not by the window with the picture.
+USE NOW: the PRG32 tools (used, not studied, in this course).
 For the lecturer: Checked by the tests up to the staging: the cartridge is built for the architecture qemu and accepted into the flash image of the emulator. What the emulator then shows is not checked automatically: Espressif QEMU needs its window. Since October 2026 the firmware starts on Setup: choose Run Cartridge, then cart0.</a:t>
             </a:r>
             <a:endParaRPr lang="en-US" dirty="0"/>
@@ -1197,6 +1203,7 @@
             <a:r>
               <a:rPr lang="en-US" dirty="0"/>
               <a:t>The same program on the kit. The firmware is written once, through USB; after that cartridges travel over Wi-Fi. The upload command is the one used for PRG32-QT with the address of the board. This is the only host that the automatic tests do not run: try it, and report what you see.
+USE NOW: the PRG32 tools (used, not studied, in this course).
 For the lecturer: Not run by the tests: there is no board on the test machine. The cartridge for the architecture esp32c6 is built by the tests; the steps are those of the PRG32 documentation. If the serial port is not found pass it explicitly. To use the Wi-Fi of the classroom: python3 -m prg32 wifi set --ssid NAME --password PASSWORD --mode sta.</a:t>
             </a:r>
             <a:endParaRPr lang="en-US" dirty="0"/>
@@ -1286,6 +1293,7 @@
             <a:r>
               <a:rPr lang="en-US" dirty="0"/>
               <a:t>The five most common symptoms, what each means, and what to do. Read the message before changing anything: it nearly always names the cause.
+USE NOW: the PRG32 tools (used, not studied, in this course).
 For the lecturer: The first three rows cover most cases. When asking for help, paste the command and the whole message as text. docs/usage/troubleshooting.md of the PRG32 repository has the complete list.</a:t>
             </a:r>
             <a:endParaRPr lang="en-US" dirty="0"/>
@@ -1553,6 +1561,7 @@
             <a:r>
               <a:rPr lang="en-US" dirty="0"/>
               <a:t>Make a folder called verm1 in your home directory and keep in it one file, verm1.S, that will grow from part to part. The first command builds the cartridge; the second sends it to PRG32-QT running on the same computer and starts it. These two commands are identical in every tutorial. If localhost does not answer, use the address shown on the Setup screen of PRG32-QT. As an alternative you can import the file from the menu of PRG32-QT.
+USE NOW: the PRG32 tools (used, not studied, in this course).
 For the lecturer: Make a folder ~/verm1 and keep one file in it, verm1.S, that grows from part to part. PRG32-QT listens on port 8080 and shows its address on the Setup screen: use that address if localhost does not answer. The same cartridge runs on QEMU (python3 -m prg32 qemu upload, then qemu run) and on the board (--url http://192.168.4.1).</a:t>
             </a:r>
             <a:endParaRPr lang="en-US" dirty="0"/>
@@ -1642,6 +1651,7 @@
             <a:r>
               <a:rPr lang="en-US" dirty="0"/>
               <a:t>Step 1 is the skeleton of Lecture 02 with the prefix verm1: three global labels and three functions that only return. Type it, build it, run it. The right result is a black screen: it proves that the tools work and that the firmware finds your functions. If the build fails here, the problem is the installation, not your program, and it must be solved before going on. The last callout is the rule of the whole project: add one thing, run, look. Never two things at once.
+UNDERSTAND NOW: the init, update, draw contract.
 For the lecturer: The skeleton of Lecture 02. If the build fails here the problem is the installation, not the program: solve it before going on.</a:t>
             </a:r>
             <a:endParaRPr lang="en-US" dirty="0"/>
@@ -1731,6 +1741,7 @@
             <a:r>
               <a:rPr lang="en-US" dirty="0"/>
               <a:t>These lines replace the beginning of the skeleton. Each .equ gives a name to a number and uses no memory: the assembler simply substitutes the number. Three colours in RGB565. Then the geometry: a cell is 8 by 8 pixels, so the 320 pixels of the width hold 40 columns; the top 8 pixels are reserved for the title, and the remaining 192 hold 24 rows. SPEED_Q8 is the speed in fixed point and will be used in step 3. Constants with names make the program readable and easy to change.
+UNDERSTAND NOW: a colour is a number.
 For the lecturer: Replace the skeleton's first lines with these. SPEED_Q8 is used in step 3.</a:t>
             </a:r>
             <a:endParaRPr lang="en-US" dirty="0"/>
@@ -1820,6 +1831,7 @@
             <a:r>
               <a:rPr lang="en-US" dirty="0"/>
               <a:t>This goes at the end of the file. The section .rodata holds what never changes: the title, a string that .asciz ends with a zero byte. The section .data holds the variables, one 32-bit word each: the column of the head, its row, and the fraction of a step accumulated so far. The initial values written here are only a start: init will set them again explicitly.
+UNDERSTAND NOW: .text, .rodata, .data.
 For the lecturer: Put this at the end of the file. step_q8 is used in step 3.</a:t>
             </a:r>
             <a:endParaRPr lang="en-US" dirty="0"/>
@@ -1908,7 +1920,8 @@
           <a:p>
             <a:r>
               <a:rPr lang="en-US" dirty="0"/>
-              <a:t>verm1_init puts the head in its place. For each variable the pattern is the same: la loads the address, li loads the value, sw stores the value at the address. The fraction step_q8 is set to zero by storing the register zero directly. The function calls nothing, so it is a leaf and needs no stack frame. Why set values that .data already contains? Because init may be called again to restart the game: never trust what memory contained.</a:t>
+              <a:t>verm1_init puts the head in its place. For each variable the pattern is the same: la loads the address, li loads the value, sw stores the value at the address. The fraction step_q8 is set to zero by storing the register zero directly. The function calls nothing, so it is a leaf and needs no stack frame. Why set values that .data already contains? Because init may be called again to restart the game: never trust what memory contained.
+UNDERSTAND NOW: address, value, load, store.</a:t>
             </a:r>
             <a:endParaRPr lang="en-US" dirty="0"/>
           </a:p>
@@ -1997,6 +2010,7 @@
             <a:r>
               <a:rPr lang="en-US" dirty="0"/>
               <a:t>verm1_draw makes three calls: clear the screen, write the title, draw the head. It therefore saves ra in a stack frame at the beginning and restores it at the end, as in Lecture 02. Look at how the cell becomes pixels: the column is loaded into a0 and shifted left by 3; the row is loaded into a1, shifted and increased by TOP. The remaining arguments are width, height and colour. Arguments travel in a0 to a4, in the order in which the function expects them.
+UNDERSTAND NOW: why ra is saved; shifts as multiplications.
 For the lecturer: prg32_gfx_text8(x, y, string, foreground, background); prg32_gfx_rect(x, y, width, height, colour).</a:t>
             </a:r>
             <a:endParaRPr lang="en-US" dirty="0"/>
@@ -3206,6 +3220,420 @@
       </p:pic>
       <p:sp>
         <p:nvSpPr>
+          <p:cNvPr id="15" name="Shape 12"/>
+          <p:cNvSpPr/>
+          <p:nvPr/>
+        </p:nvSpPr>
+        <p:spPr>
+          <a:xfrm>
+            <a:off x="9690303" y="91440"/>
+            <a:ext cx="1952752" cy="274320"/>
+          </a:xfrm>
+          <a:prstGeom prst="rect">
+            <a:avLst/>
+          </a:prstGeom>
+          <a:solidFill>
+            <a:srgbClr val="F3E8FF"/>
+          </a:solidFill>
+          <a:ln w="12700">
+            <a:solidFill>
+              <a:srgbClr val="7E22CE"/>
+            </a:solidFill>
+            <a:prstDash val="dash"/>
+          </a:ln>
+        </p:spPr>
+      </p:sp>
+      <p:sp>
+        <p:nvSpPr>
+          <p:cNvPr id="16" name="Shape 13"/>
+          <p:cNvSpPr/>
+          <p:nvPr/>
+        </p:nvSpPr>
+        <p:spPr>
+          <a:xfrm>
+            <a:off x="9717735" y="128016"/>
+            <a:ext cx="45720" cy="45720"/>
+          </a:xfrm>
+          <a:prstGeom prst="rect">
+            <a:avLst/>
+          </a:prstGeom>
+          <a:solidFill>
+            <a:srgbClr val="7E22CE"/>
+          </a:solidFill>
+          <a:ln w="12700">
+            <a:solidFill>
+              <a:srgbClr val="7E22CE"/>
+            </a:solidFill>
+            <a:prstDash val="solid"/>
+          </a:ln>
+        </p:spPr>
+      </p:sp>
+      <p:sp>
+        <p:nvSpPr>
+          <p:cNvPr id="17" name="Shape 14"/>
+          <p:cNvSpPr/>
+          <p:nvPr/>
+        </p:nvSpPr>
+        <p:spPr>
+          <a:xfrm>
+            <a:off x="9717735" y="205740"/>
+            <a:ext cx="45720" cy="45720"/>
+          </a:xfrm>
+          <a:prstGeom prst="rect">
+            <a:avLst/>
+          </a:prstGeom>
+          <a:solidFill>
+            <a:srgbClr val="7E22CE"/>
+          </a:solidFill>
+          <a:ln w="12700">
+            <a:solidFill>
+              <a:srgbClr val="7E22CE"/>
+            </a:solidFill>
+            <a:prstDash val="solid"/>
+          </a:ln>
+        </p:spPr>
+      </p:sp>
+      <p:sp>
+        <p:nvSpPr>
+          <p:cNvPr id="18" name="Shape 15"/>
+          <p:cNvSpPr/>
+          <p:nvPr/>
+        </p:nvSpPr>
+        <p:spPr>
+          <a:xfrm>
+            <a:off x="9717735" y="283464"/>
+            <a:ext cx="45720" cy="45720"/>
+          </a:xfrm>
+          <a:prstGeom prst="rect">
+            <a:avLst/>
+          </a:prstGeom>
+          <a:solidFill>
+            <a:srgbClr val="7E22CE"/>
+          </a:solidFill>
+          <a:ln w="12700">
+            <a:solidFill>
+              <a:srgbClr val="7E22CE"/>
+            </a:solidFill>
+            <a:prstDash val="solid"/>
+          </a:ln>
+        </p:spPr>
+      </p:sp>
+      <p:pic>
+        <p:nvPicPr>
+          <p:cNvPr id="19" name="Image 1" descr="preencoded.png">    </p:cNvPr>
+          <p:cNvPicPr>
+            <a:picLocks noChangeAspect="1"/>
+          </p:cNvPicPr>
+          <p:nvPr/>
+        </p:nvPicPr>
+        <p:blipFill>
+          <a:blip r:embed="rId2"/>
+          <a:stretch>
+            <a:fillRect/>
+          </a:stretch>
+        </p:blipFill>
+        <p:spPr>
+          <a:xfrm>
+            <a:off x="9818319" y="128016"/>
+            <a:ext cx="201168" cy="201168"/>
+          </a:xfrm>
+          <a:prstGeom prst="rect">
+            <a:avLst/>
+          </a:prstGeom>
+        </p:spPr>
+      </p:pic>
+      <p:sp>
+        <p:nvSpPr>
+          <p:cNvPr id="20" name="Text 16"/>
+          <p:cNvSpPr txBox="1"/>
+          <p:nvPr/>
+        </p:nvSpPr>
+        <p:spPr>
+          <a:xfrm>
+            <a:off x="10074351" y="91440"/>
+            <a:ext cx="1532128" cy="274320"/>
+          </a:xfrm>
+          <a:prstGeom prst="rect">
+            <a:avLst/>
+          </a:prstGeom>
+          <a:noFill/>
+          <a:ln/>
+        </p:spPr>
+        <p:txBody>
+          <a:bodyPr wrap="square" lIns="0" tIns="0" rIns="0" bIns="0" rtlCol="0" anchor="ctr"/>
+          <a:lstStyle/>
+          <a:p>
+            <a:pPr indent="0" marL="0">
+              <a:buNone/>
+            </a:pPr>
+            <a:r>
+              <a:rPr lang="en-US" sz="1100" b="1" dirty="0">
+                <a:solidFill>
+                  <a:srgbClr val="6B21A8"/>
+                </a:solidFill>
+                <a:latin typeface="Calibri" pitchFamily="34" charset="0"/>
+                <a:ea typeface="Calibri" pitchFamily="34" charset="-122"/>
+                <a:cs typeface="Calibri" pitchFamily="34" charset="-120"/>
+              </a:rPr>
+              <a:t>UNDERSTAND LATER</a:t>
+            </a:r>
+            <a:endParaRPr lang="en-US" sz="1100" dirty="0"/>
+          </a:p>
+        </p:txBody>
+      </p:sp>
+      <p:sp>
+        <p:nvSpPr>
+          <p:cNvPr id="21" name="Shape 17"/>
+          <p:cNvSpPr/>
+          <p:nvPr/>
+        </p:nvSpPr>
+        <p:spPr>
+          <a:xfrm>
+            <a:off x="8407349" y="91440"/>
+            <a:ext cx="1173226" cy="274320"/>
+          </a:xfrm>
+          <a:prstGeom prst="rect">
+            <a:avLst/>
+          </a:prstGeom>
+          <a:solidFill>
+            <a:srgbClr val="FEF3C7"/>
+          </a:solidFill>
+          <a:ln w="12700">
+            <a:solidFill>
+              <a:srgbClr val="B45309"/>
+            </a:solidFill>
+            <a:prstDash val="solid"/>
+          </a:ln>
+        </p:spPr>
+      </p:sp>
+      <p:sp>
+        <p:nvSpPr>
+          <p:cNvPr id="22" name="Shape 18"/>
+          <p:cNvSpPr/>
+          <p:nvPr/>
+        </p:nvSpPr>
+        <p:spPr>
+          <a:xfrm>
+            <a:off x="8407349" y="91440"/>
+            <a:ext cx="27432" cy="274320"/>
+          </a:xfrm>
+          <a:prstGeom prst="rect">
+            <a:avLst/>
+          </a:prstGeom>
+          <a:solidFill>
+            <a:srgbClr val="B45309"/>
+          </a:solidFill>
+          <a:ln w="12700">
+            <a:solidFill>
+              <a:srgbClr val="B45309"/>
+            </a:solidFill>
+            <a:prstDash val="solid"/>
+          </a:ln>
+        </p:spPr>
+      </p:sp>
+      <p:sp>
+        <p:nvSpPr>
+          <p:cNvPr id="23" name="Shape 19"/>
+          <p:cNvSpPr/>
+          <p:nvPr/>
+        </p:nvSpPr>
+        <p:spPr>
+          <a:xfrm>
+            <a:off x="8462213" y="91440"/>
+            <a:ext cx="27432" cy="274320"/>
+          </a:xfrm>
+          <a:prstGeom prst="rect">
+            <a:avLst/>
+          </a:prstGeom>
+          <a:solidFill>
+            <a:srgbClr val="B45309"/>
+          </a:solidFill>
+          <a:ln w="12700">
+            <a:solidFill>
+              <a:srgbClr val="B45309"/>
+            </a:solidFill>
+            <a:prstDash val="solid"/>
+          </a:ln>
+        </p:spPr>
+      </p:sp>
+      <p:pic>
+        <p:nvPicPr>
+          <p:cNvPr id="24" name="Image 2" descr="preencoded.png">    </p:cNvPr>
+          <p:cNvPicPr>
+            <a:picLocks noChangeAspect="1"/>
+          </p:cNvPicPr>
+          <p:nvPr/>
+        </p:nvPicPr>
+        <p:blipFill>
+          <a:blip r:embed="rId3"/>
+          <a:stretch>
+            <a:fillRect/>
+          </a:stretch>
+        </p:blipFill>
+        <p:spPr>
+          <a:xfrm>
+            <a:off x="8535365" y="128016"/>
+            <a:ext cx="201168" cy="201168"/>
+          </a:xfrm>
+          <a:prstGeom prst="rect">
+            <a:avLst/>
+          </a:prstGeom>
+        </p:spPr>
+      </p:pic>
+      <p:sp>
+        <p:nvSpPr>
+          <p:cNvPr id="25" name="Text 20"/>
+          <p:cNvSpPr txBox="1"/>
+          <p:nvPr/>
+        </p:nvSpPr>
+        <p:spPr>
+          <a:xfrm>
+            <a:off x="8791397" y="91440"/>
+            <a:ext cx="752602" cy="274320"/>
+          </a:xfrm>
+          <a:prstGeom prst="rect">
+            <a:avLst/>
+          </a:prstGeom>
+          <a:noFill/>
+          <a:ln/>
+        </p:spPr>
+        <p:txBody>
+          <a:bodyPr wrap="square" lIns="0" tIns="0" rIns="0" bIns="0" rtlCol="0" anchor="ctr"/>
+          <a:lstStyle/>
+          <a:p>
+            <a:pPr indent="0" marL="0">
+              <a:buNone/>
+            </a:pPr>
+            <a:r>
+              <a:rPr lang="en-US" sz="1100" b="1" dirty="0">
+                <a:solidFill>
+                  <a:srgbClr val="92400E"/>
+                </a:solidFill>
+                <a:latin typeface="Calibri" pitchFamily="34" charset="0"/>
+                <a:ea typeface="Calibri" pitchFamily="34" charset="-122"/>
+                <a:cs typeface="Calibri" pitchFamily="34" charset="-120"/>
+              </a:rPr>
+              <a:t>USE NOW</a:t>
+            </a:r>
+            <a:endParaRPr lang="en-US" sz="1100" dirty="0"/>
+          </a:p>
+        </p:txBody>
+      </p:sp>
+      <p:sp>
+        <p:nvSpPr>
+          <p:cNvPr id="26" name="Shape 21"/>
+          <p:cNvSpPr/>
+          <p:nvPr/>
+        </p:nvSpPr>
+        <p:spPr>
+          <a:xfrm>
+            <a:off x="6518097" y="91440"/>
+            <a:ext cx="1779524" cy="274320"/>
+          </a:xfrm>
+          <a:prstGeom prst="rect">
+            <a:avLst/>
+          </a:prstGeom>
+          <a:solidFill>
+            <a:srgbClr val="E0F2FE"/>
+          </a:solidFill>
+          <a:ln w="12700">
+            <a:solidFill>
+              <a:srgbClr val="0369A1"/>
+            </a:solidFill>
+            <a:prstDash val="solid"/>
+          </a:ln>
+        </p:spPr>
+      </p:sp>
+      <p:sp>
+        <p:nvSpPr>
+          <p:cNvPr id="27" name="Shape 22"/>
+          <p:cNvSpPr/>
+          <p:nvPr/>
+        </p:nvSpPr>
+        <p:spPr>
+          <a:xfrm>
+            <a:off x="6518097" y="91440"/>
+            <a:ext cx="73152" cy="274320"/>
+          </a:xfrm>
+          <a:prstGeom prst="rect">
+            <a:avLst/>
+          </a:prstGeom>
+          <a:solidFill>
+            <a:srgbClr val="0369A1"/>
+          </a:solidFill>
+          <a:ln w="12700">
+            <a:solidFill>
+              <a:srgbClr val="0369A1"/>
+            </a:solidFill>
+            <a:prstDash val="solid"/>
+          </a:ln>
+        </p:spPr>
+      </p:sp>
+      <p:pic>
+        <p:nvPicPr>
+          <p:cNvPr id="28" name="Image 3" descr="preencoded.png">    </p:cNvPr>
+          <p:cNvPicPr>
+            <a:picLocks noChangeAspect="1"/>
+          </p:cNvPicPr>
+          <p:nvPr/>
+        </p:nvPicPr>
+        <p:blipFill>
+          <a:blip r:embed="rId4"/>
+          <a:stretch>
+            <a:fillRect/>
+          </a:stretch>
+        </p:blipFill>
+        <p:spPr>
+          <a:xfrm>
+            <a:off x="6646113" y="128016"/>
+            <a:ext cx="201168" cy="201168"/>
+          </a:xfrm>
+          <a:prstGeom prst="rect">
+            <a:avLst/>
+          </a:prstGeom>
+        </p:spPr>
+      </p:pic>
+      <p:sp>
+        <p:nvSpPr>
+          <p:cNvPr id="29" name="Text 23"/>
+          <p:cNvSpPr txBox="1"/>
+          <p:nvPr/>
+        </p:nvSpPr>
+        <p:spPr>
+          <a:xfrm>
+            <a:off x="6902145" y="91440"/>
+            <a:ext cx="1358900" cy="274320"/>
+          </a:xfrm>
+          <a:prstGeom prst="rect">
+            <a:avLst/>
+          </a:prstGeom>
+          <a:noFill/>
+          <a:ln/>
+        </p:spPr>
+        <p:txBody>
+          <a:bodyPr wrap="square" lIns="0" tIns="0" rIns="0" bIns="0" rtlCol="0" anchor="ctr"/>
+          <a:lstStyle/>
+          <a:p>
+            <a:pPr indent="0" marL="0">
+              <a:buNone/>
+            </a:pPr>
+            <a:r>
+              <a:rPr lang="en-US" sz="1100" b="1" dirty="0">
+                <a:solidFill>
+                  <a:srgbClr val="075985"/>
+                </a:solidFill>
+                <a:latin typeface="Calibri" pitchFamily="34" charset="0"/>
+                <a:ea typeface="Calibri" pitchFamily="34" charset="-122"/>
+                <a:cs typeface="Calibri" pitchFamily="34" charset="-120"/>
+              </a:rPr>
+              <a:t>UNDERSTAND NOW</a:t>
+            </a:r>
+            <a:endParaRPr lang="en-US" sz="1100" dirty="0"/>
+          </a:p>
+        </p:txBody>
+      </p:sp>
+      <p:sp>
+        <p:nvSpPr>
           <p:cNvPr id="25" name="Slide Number Placeholder 0"/>
           <p:cNvSpPr>
             <a:spLocks noGrp="1"/>
@@ -4214,6 +4642,133 @@
       </p:sp>
       <p:sp>
         <p:nvSpPr>
+          <p:cNvPr id="17" name="Shape 15"/>
+          <p:cNvSpPr/>
+          <p:nvPr/>
+        </p:nvSpPr>
+        <p:spPr>
+          <a:xfrm>
+            <a:off x="8944305" y="91440"/>
+            <a:ext cx="2698750" cy="274320"/>
+          </a:xfrm>
+          <a:prstGeom prst="rect">
+            <a:avLst/>
+          </a:prstGeom>
+          <a:solidFill>
+            <a:srgbClr val="E0F2FE"/>
+          </a:solidFill>
+          <a:ln w="12700">
+            <a:solidFill>
+              <a:srgbClr val="0369A1"/>
+            </a:solidFill>
+            <a:prstDash val="solid"/>
+          </a:ln>
+        </p:spPr>
+      </p:sp>
+      <p:sp>
+        <p:nvSpPr>
+          <p:cNvPr id="18" name="Shape 16"/>
+          <p:cNvSpPr/>
+          <p:nvPr/>
+        </p:nvSpPr>
+        <p:spPr>
+          <a:xfrm>
+            <a:off x="8944305" y="91440"/>
+            <a:ext cx="73152" cy="274320"/>
+          </a:xfrm>
+          <a:prstGeom prst="rect">
+            <a:avLst/>
+          </a:prstGeom>
+          <a:solidFill>
+            <a:srgbClr val="0369A1"/>
+          </a:solidFill>
+          <a:ln w="12700">
+            <a:solidFill>
+              <a:srgbClr val="0369A1"/>
+            </a:solidFill>
+            <a:prstDash val="solid"/>
+          </a:ln>
+        </p:spPr>
+      </p:sp>
+      <p:pic>
+        <p:nvPicPr>
+          <p:cNvPr id="19" name="Image 0" descr="preencoded.png">    </p:cNvPr>
+          <p:cNvPicPr>
+            <a:picLocks noChangeAspect="1"/>
+          </p:cNvPicPr>
+          <p:nvPr/>
+        </p:nvPicPr>
+        <p:blipFill>
+          <a:blip r:embed="rId1"/>
+          <a:stretch>
+            <a:fillRect/>
+          </a:stretch>
+        </p:blipFill>
+        <p:spPr>
+          <a:xfrm>
+            <a:off x="9072321" y="128016"/>
+            <a:ext cx="201168" cy="201168"/>
+          </a:xfrm>
+          <a:prstGeom prst="rect">
+            <a:avLst/>
+          </a:prstGeom>
+        </p:spPr>
+      </p:pic>
+      <p:sp>
+        <p:nvSpPr>
+          <p:cNvPr id="20" name="Text 17"/>
+          <p:cNvSpPr txBox="1"/>
+          <p:nvPr/>
+        </p:nvSpPr>
+        <p:spPr>
+          <a:xfrm>
+            <a:off x="9328353" y="91440"/>
+            <a:ext cx="2278126" cy="274320"/>
+          </a:xfrm>
+          <a:prstGeom prst="rect">
+            <a:avLst/>
+          </a:prstGeom>
+          <a:noFill/>
+          <a:ln/>
+        </p:spPr>
+        <p:txBody>
+          <a:bodyPr wrap="square" lIns="0" tIns="0" rIns="0" bIns="0" rtlCol="0" anchor="ctr"/>
+          <a:lstStyle/>
+          <a:p>
+            <a:pPr indent="0" marL="0">
+              <a:buNone/>
+            </a:pPr>
+            <a:r>
+              <a:rPr lang="en-US" sz="1100" b="1" dirty="0">
+                <a:solidFill>
+                  <a:srgbClr val="075985"/>
+                </a:solidFill>
+                <a:latin typeface="Calibri" pitchFamily="34" charset="0"/>
+                <a:ea typeface="Calibri" pitchFamily="34" charset="-122"/>
+                <a:cs typeface="Calibri" pitchFamily="34" charset="-120"/>
+              </a:rPr>
+              <a:t>UNDERSTAND NOW</a:t>
+            </a:r>
+            <a:pPr indent="0" marL="0">
+              <a:buNone/>
+            </a:pPr>
+            <a:r>
+              <a:rPr lang="en-US" sz="1100" dirty="0">
+                <a:solidFill>
+                  <a:srgbClr val="075985"/>
+                </a:solidFill>
+                <a:latin typeface="Calibri" pitchFamily="34" charset="0"/>
+                <a:ea typeface="Calibri" pitchFamily="34" charset="-122"/>
+                <a:cs typeface="Calibri" pitchFamily="34" charset="-120"/>
+              </a:rPr>
+              <a:t> · fixed point</a:t>
+            </a:r>
+            <a:endParaRPr lang="en-US" sz="1100" dirty="0"/>
+          </a:p>
+        </p:txBody>
+      </p:sp>
+      <p:sp>
+        <p:nvSpPr>
           <p:cNvPr id="25" name="Slide Number Placeholder 0"/>
           <p:cNvSpPr>
             <a:spLocks noGrp="1"/>
@@ -5672,6 +6227,324 @@
       </p:sp>
       <p:sp>
         <p:nvSpPr>
+          <p:cNvPr id="17" name="Shape 15"/>
+          <p:cNvSpPr/>
+          <p:nvPr/>
+        </p:nvSpPr>
+        <p:spPr>
+          <a:xfrm>
+            <a:off x="7283272" y="91440"/>
+            <a:ext cx="4359783" cy="274320"/>
+          </a:xfrm>
+          <a:prstGeom prst="rect">
+            <a:avLst/>
+          </a:prstGeom>
+          <a:solidFill>
+            <a:srgbClr val="F3E8FF"/>
+          </a:solidFill>
+          <a:ln w="12700">
+            <a:solidFill>
+              <a:srgbClr val="7E22CE"/>
+            </a:solidFill>
+            <a:prstDash val="dash"/>
+          </a:ln>
+        </p:spPr>
+      </p:sp>
+      <p:sp>
+        <p:nvSpPr>
+          <p:cNvPr id="18" name="Shape 16"/>
+          <p:cNvSpPr/>
+          <p:nvPr/>
+        </p:nvSpPr>
+        <p:spPr>
+          <a:xfrm>
+            <a:off x="7310704" y="128016"/>
+            <a:ext cx="45720" cy="45720"/>
+          </a:xfrm>
+          <a:prstGeom prst="rect">
+            <a:avLst/>
+          </a:prstGeom>
+          <a:solidFill>
+            <a:srgbClr val="7E22CE"/>
+          </a:solidFill>
+          <a:ln w="12700">
+            <a:solidFill>
+              <a:srgbClr val="7E22CE"/>
+            </a:solidFill>
+            <a:prstDash val="solid"/>
+          </a:ln>
+        </p:spPr>
+      </p:sp>
+      <p:sp>
+        <p:nvSpPr>
+          <p:cNvPr id="19" name="Shape 17"/>
+          <p:cNvSpPr/>
+          <p:nvPr/>
+        </p:nvSpPr>
+        <p:spPr>
+          <a:xfrm>
+            <a:off x="7310704" y="205740"/>
+            <a:ext cx="45720" cy="45720"/>
+          </a:xfrm>
+          <a:prstGeom prst="rect">
+            <a:avLst/>
+          </a:prstGeom>
+          <a:solidFill>
+            <a:srgbClr val="7E22CE"/>
+          </a:solidFill>
+          <a:ln w="12700">
+            <a:solidFill>
+              <a:srgbClr val="7E22CE"/>
+            </a:solidFill>
+            <a:prstDash val="solid"/>
+          </a:ln>
+        </p:spPr>
+      </p:sp>
+      <p:sp>
+        <p:nvSpPr>
+          <p:cNvPr id="20" name="Shape 18"/>
+          <p:cNvSpPr/>
+          <p:nvPr/>
+        </p:nvSpPr>
+        <p:spPr>
+          <a:xfrm>
+            <a:off x="7310704" y="283464"/>
+            <a:ext cx="45720" cy="45720"/>
+          </a:xfrm>
+          <a:prstGeom prst="rect">
+            <a:avLst/>
+          </a:prstGeom>
+          <a:solidFill>
+            <a:srgbClr val="7E22CE"/>
+          </a:solidFill>
+          <a:ln w="12700">
+            <a:solidFill>
+              <a:srgbClr val="7E22CE"/>
+            </a:solidFill>
+            <a:prstDash val="solid"/>
+          </a:ln>
+        </p:spPr>
+      </p:sp>
+      <p:pic>
+        <p:nvPicPr>
+          <p:cNvPr id="21" name="Image 0" descr="preencoded.png">    </p:cNvPr>
+          <p:cNvPicPr>
+            <a:picLocks noChangeAspect="1"/>
+          </p:cNvPicPr>
+          <p:nvPr/>
+        </p:nvPicPr>
+        <p:blipFill>
+          <a:blip r:embed="rId1"/>
+          <a:stretch>
+            <a:fillRect/>
+          </a:stretch>
+        </p:blipFill>
+        <p:spPr>
+          <a:xfrm>
+            <a:off x="7411288" y="128016"/>
+            <a:ext cx="201168" cy="201168"/>
+          </a:xfrm>
+          <a:prstGeom prst="rect">
+            <a:avLst/>
+          </a:prstGeom>
+        </p:spPr>
+      </p:pic>
+      <p:sp>
+        <p:nvSpPr>
+          <p:cNvPr id="22" name="Text 19"/>
+          <p:cNvSpPr txBox="1"/>
+          <p:nvPr/>
+        </p:nvSpPr>
+        <p:spPr>
+          <a:xfrm>
+            <a:off x="7667320" y="91440"/>
+            <a:ext cx="3939159" cy="274320"/>
+          </a:xfrm>
+          <a:prstGeom prst="rect">
+            <a:avLst/>
+          </a:prstGeom>
+          <a:noFill/>
+          <a:ln/>
+        </p:spPr>
+        <p:txBody>
+          <a:bodyPr wrap="square" lIns="0" tIns="0" rIns="0" bIns="0" rtlCol="0" anchor="ctr"/>
+          <a:lstStyle/>
+          <a:p>
+            <a:pPr indent="0" marL="0">
+              <a:buNone/>
+            </a:pPr>
+            <a:r>
+              <a:rPr lang="en-US" sz="1100" b="1" dirty="0">
+                <a:solidFill>
+                  <a:srgbClr val="6B21A8"/>
+                </a:solidFill>
+                <a:latin typeface="Calibri" pitchFamily="34" charset="0"/>
+                <a:ea typeface="Calibri" pitchFamily="34" charset="-122"/>
+                <a:cs typeface="Calibri" pitchFamily="34" charset="-120"/>
+              </a:rPr>
+              <a:t>UNDERSTAND LATER</a:t>
+            </a:r>
+            <a:pPr indent="0" marL="0">
+              <a:buNone/>
+            </a:pPr>
+            <a:r>
+              <a:rPr lang="en-US" sz="1100" dirty="0">
+                <a:solidFill>
+                  <a:srgbClr val="6B21A8"/>
+                </a:solidFill>
+                <a:latin typeface="Calibri" pitchFamily="34" charset="0"/>
+                <a:ea typeface="Calibri" pitchFamily="34" charset="-122"/>
+                <a:cs typeface="Calibri" pitchFamily="34" charset="-120"/>
+              </a:rPr>
+              <a:t> · instruction formats</a:t>
+            </a:r>
+            <a:pPr indent="0" marL="0">
+              <a:buNone/>
+            </a:pPr>
+            <a:r>
+              <a:rPr lang="en-US" sz="1100" b="1" dirty="0">
+                <a:solidFill>
+                  <a:srgbClr val="6B21A8"/>
+                </a:solidFill>
+                <a:latin typeface="Calibri" pitchFamily="34" charset="0"/>
+                <a:ea typeface="Calibri" pitchFamily="34" charset="-122"/>
+                <a:cs typeface="Calibri" pitchFamily="34" charset="-120"/>
+              </a:rPr>
+              <a:t> → Lecture 19</a:t>
+            </a:r>
+            <a:endParaRPr lang="en-US" sz="1100" dirty="0"/>
+          </a:p>
+        </p:txBody>
+      </p:sp>
+      <p:sp>
+        <p:nvSpPr>
+          <p:cNvPr id="23" name="Shape 20"/>
+          <p:cNvSpPr/>
+          <p:nvPr/>
+        </p:nvSpPr>
+        <p:spPr>
+          <a:xfrm>
+            <a:off x="3949522" y="91440"/>
+            <a:ext cx="3224022" cy="274320"/>
+          </a:xfrm>
+          <a:prstGeom prst="rect">
+            <a:avLst/>
+          </a:prstGeom>
+          <a:solidFill>
+            <a:srgbClr val="E0F2FE"/>
+          </a:solidFill>
+          <a:ln w="12700">
+            <a:solidFill>
+              <a:srgbClr val="0369A1"/>
+            </a:solidFill>
+            <a:prstDash val="solid"/>
+          </a:ln>
+        </p:spPr>
+      </p:sp>
+      <p:sp>
+        <p:nvSpPr>
+          <p:cNvPr id="24" name="Shape 21"/>
+          <p:cNvSpPr/>
+          <p:nvPr/>
+        </p:nvSpPr>
+        <p:spPr>
+          <a:xfrm>
+            <a:off x="3949522" y="91440"/>
+            <a:ext cx="73152" cy="274320"/>
+          </a:xfrm>
+          <a:prstGeom prst="rect">
+            <a:avLst/>
+          </a:prstGeom>
+          <a:solidFill>
+            <a:srgbClr val="0369A1"/>
+          </a:solidFill>
+          <a:ln w="12700">
+            <a:solidFill>
+              <a:srgbClr val="0369A1"/>
+            </a:solidFill>
+            <a:prstDash val="solid"/>
+          </a:ln>
+        </p:spPr>
+      </p:sp>
+      <p:pic>
+        <p:nvPicPr>
+          <p:cNvPr id="25" name="Image 1" descr="preencoded.png">    </p:cNvPr>
+          <p:cNvPicPr>
+            <a:picLocks noChangeAspect="1"/>
+          </p:cNvPicPr>
+          <p:nvPr/>
+        </p:nvPicPr>
+        <p:blipFill>
+          <a:blip r:embed="rId2"/>
+          <a:stretch>
+            <a:fillRect/>
+          </a:stretch>
+        </p:blipFill>
+        <p:spPr>
+          <a:xfrm>
+            <a:off x="4077538" y="128016"/>
+            <a:ext cx="201168" cy="201168"/>
+          </a:xfrm>
+          <a:prstGeom prst="rect">
+            <a:avLst/>
+          </a:prstGeom>
+        </p:spPr>
+      </p:pic>
+      <p:sp>
+        <p:nvSpPr>
+          <p:cNvPr id="26" name="Text 22"/>
+          <p:cNvSpPr txBox="1"/>
+          <p:nvPr/>
+        </p:nvSpPr>
+        <p:spPr>
+          <a:xfrm>
+            <a:off x="4333570" y="91440"/>
+            <a:ext cx="2803398" cy="274320"/>
+          </a:xfrm>
+          <a:prstGeom prst="rect">
+            <a:avLst/>
+          </a:prstGeom>
+          <a:noFill/>
+          <a:ln/>
+        </p:spPr>
+        <p:txBody>
+          <a:bodyPr wrap="square" lIns="0" tIns="0" rIns="0" bIns="0" rtlCol="0" anchor="ctr"/>
+          <a:lstStyle/>
+          <a:p>
+            <a:pPr indent="0" marL="0">
+              <a:buNone/>
+            </a:pPr>
+            <a:r>
+              <a:rPr lang="en-US" sz="1100" b="1" dirty="0">
+                <a:solidFill>
+                  <a:srgbClr val="075985"/>
+                </a:solidFill>
+                <a:latin typeface="Calibri" pitchFamily="34" charset="0"/>
+                <a:ea typeface="Calibri" pitchFamily="34" charset="-122"/>
+                <a:cs typeface="Calibri" pitchFamily="34" charset="-120"/>
+              </a:rPr>
+              <a:t>UNDERSTAND NOW</a:t>
+            </a:r>
+            <a:pPr indent="0" marL="0">
+              <a:buNone/>
+            </a:pPr>
+            <a:r>
+              <a:rPr lang="en-US" sz="1100" dirty="0">
+                <a:solidFill>
+                  <a:srgbClr val="075985"/>
+                </a:solidFill>
+                <a:latin typeface="Calibri" pitchFamily="34" charset="0"/>
+                <a:ea typeface="Calibri" pitchFamily="34" charset="-122"/>
+                <a:cs typeface="Calibri" pitchFamily="34" charset="-120"/>
+              </a:rPr>
+              <a:t> · pseudo-instructions</a:t>
+            </a:r>
+            <a:endParaRPr lang="en-US" sz="1100" dirty="0"/>
+          </a:p>
+        </p:txBody>
+      </p:sp>
+      <p:sp>
+        <p:nvSpPr>
           <p:cNvPr id="25" name="Slide Number Placeholder 0"/>
           <p:cNvSpPr>
             <a:spLocks noGrp="1"/>
@@ -6825,6 +7698,158 @@
       </p:sp>
       <p:sp>
         <p:nvSpPr>
+          <p:cNvPr id="17" name="Shape 15"/>
+          <p:cNvSpPr/>
+          <p:nvPr/>
+        </p:nvSpPr>
+        <p:spPr>
+          <a:xfrm>
+            <a:off x="9287967" y="91440"/>
+            <a:ext cx="2355088" cy="274320"/>
+          </a:xfrm>
+          <a:prstGeom prst="rect">
+            <a:avLst/>
+          </a:prstGeom>
+          <a:solidFill>
+            <a:srgbClr val="FEF3C7"/>
+          </a:solidFill>
+          <a:ln w="12700">
+            <a:solidFill>
+              <a:srgbClr val="B45309"/>
+            </a:solidFill>
+            <a:prstDash val="solid"/>
+          </a:ln>
+        </p:spPr>
+      </p:sp>
+      <p:sp>
+        <p:nvSpPr>
+          <p:cNvPr id="18" name="Shape 16"/>
+          <p:cNvSpPr/>
+          <p:nvPr/>
+        </p:nvSpPr>
+        <p:spPr>
+          <a:xfrm>
+            <a:off x="9287967" y="91440"/>
+            <a:ext cx="27432" cy="274320"/>
+          </a:xfrm>
+          <a:prstGeom prst="rect">
+            <a:avLst/>
+          </a:prstGeom>
+          <a:solidFill>
+            <a:srgbClr val="B45309"/>
+          </a:solidFill>
+          <a:ln w="12700">
+            <a:solidFill>
+              <a:srgbClr val="B45309"/>
+            </a:solidFill>
+            <a:prstDash val="solid"/>
+          </a:ln>
+        </p:spPr>
+      </p:sp>
+      <p:sp>
+        <p:nvSpPr>
+          <p:cNvPr id="19" name="Shape 17"/>
+          <p:cNvSpPr/>
+          <p:nvPr/>
+        </p:nvSpPr>
+        <p:spPr>
+          <a:xfrm>
+            <a:off x="9342831" y="91440"/>
+            <a:ext cx="27432" cy="274320"/>
+          </a:xfrm>
+          <a:prstGeom prst="rect">
+            <a:avLst/>
+          </a:prstGeom>
+          <a:solidFill>
+            <a:srgbClr val="B45309"/>
+          </a:solidFill>
+          <a:ln w="12700">
+            <a:solidFill>
+              <a:srgbClr val="B45309"/>
+            </a:solidFill>
+            <a:prstDash val="solid"/>
+          </a:ln>
+        </p:spPr>
+      </p:sp>
+      <p:pic>
+        <p:nvPicPr>
+          <p:cNvPr id="20" name="Image 0" descr="preencoded.png">    </p:cNvPr>
+          <p:cNvPicPr>
+            <a:picLocks noChangeAspect="1"/>
+          </p:cNvPicPr>
+          <p:nvPr/>
+        </p:nvPicPr>
+        <p:blipFill>
+          <a:blip r:embed="rId1"/>
+          <a:stretch>
+            <a:fillRect/>
+          </a:stretch>
+        </p:blipFill>
+        <p:spPr>
+          <a:xfrm>
+            <a:off x="9415983" y="128016"/>
+            <a:ext cx="201168" cy="201168"/>
+          </a:xfrm>
+          <a:prstGeom prst="rect">
+            <a:avLst/>
+          </a:prstGeom>
+        </p:spPr>
+      </p:pic>
+      <p:sp>
+        <p:nvSpPr>
+          <p:cNvPr id="21" name="Text 18"/>
+          <p:cNvSpPr txBox="1"/>
+          <p:nvPr/>
+        </p:nvSpPr>
+        <p:spPr>
+          <a:xfrm>
+            <a:off x="9672015" y="91440"/>
+            <a:ext cx="1934464" cy="274320"/>
+          </a:xfrm>
+          <a:prstGeom prst="rect">
+            <a:avLst/>
+          </a:prstGeom>
+          <a:noFill/>
+          <a:ln/>
+        </p:spPr>
+        <p:txBody>
+          <a:bodyPr wrap="square" lIns="0" tIns="0" rIns="0" bIns="0" rtlCol="0" anchor="ctr"/>
+          <a:lstStyle/>
+          <a:p>
+            <a:pPr indent="0" marL="0">
+              <a:buNone/>
+            </a:pPr>
+            <a:r>
+              <a:rPr lang="en-US" sz="1100" b="1" dirty="0">
+                <a:solidFill>
+                  <a:srgbClr val="92400E"/>
+                </a:solidFill>
+                <a:latin typeface="Calibri" pitchFamily="34" charset="0"/>
+                <a:ea typeface="Calibri" pitchFamily="34" charset="-122"/>
+                <a:cs typeface="Calibri" pitchFamily="34" charset="-120"/>
+              </a:rPr>
+              <a:t>USE NOW</a:t>
+            </a:r>
+            <a:pPr indent="0" marL="0">
+              <a:buNone/>
+            </a:pPr>
+            <a:r>
+              <a:rPr lang="en-US" sz="1100" dirty="0">
+                <a:solidFill>
+                  <a:srgbClr val="92400E"/>
+                </a:solidFill>
+                <a:latin typeface="Calibri" pitchFamily="34" charset="0"/>
+                <a:ea typeface="Calibri" pitchFamily="34" charset="-122"/>
+                <a:cs typeface="Calibri" pitchFamily="34" charset="-120"/>
+              </a:rPr>
+              <a:t> · the PRG32 tools</a:t>
+            </a:r>
+            <a:endParaRPr lang="en-US" sz="1100" dirty="0"/>
+          </a:p>
+        </p:txBody>
+      </p:sp>
+      <p:sp>
+        <p:nvSpPr>
           <p:cNvPr id="25" name="Slide Number Placeholder 0"/>
           <p:cNvSpPr>
             <a:spLocks noGrp="1"/>
@@ -7661,6 +8686,158 @@
       </p:sp>
       <p:sp>
         <p:nvSpPr>
+          <p:cNvPr id="17" name="Shape 15"/>
+          <p:cNvSpPr/>
+          <p:nvPr/>
+        </p:nvSpPr>
+        <p:spPr>
+          <a:xfrm>
+            <a:off x="9287967" y="91440"/>
+            <a:ext cx="2355088" cy="274320"/>
+          </a:xfrm>
+          <a:prstGeom prst="rect">
+            <a:avLst/>
+          </a:prstGeom>
+          <a:solidFill>
+            <a:srgbClr val="FEF3C7"/>
+          </a:solidFill>
+          <a:ln w="12700">
+            <a:solidFill>
+              <a:srgbClr val="B45309"/>
+            </a:solidFill>
+            <a:prstDash val="solid"/>
+          </a:ln>
+        </p:spPr>
+      </p:sp>
+      <p:sp>
+        <p:nvSpPr>
+          <p:cNvPr id="18" name="Shape 16"/>
+          <p:cNvSpPr/>
+          <p:nvPr/>
+        </p:nvSpPr>
+        <p:spPr>
+          <a:xfrm>
+            <a:off x="9287967" y="91440"/>
+            <a:ext cx="27432" cy="274320"/>
+          </a:xfrm>
+          <a:prstGeom prst="rect">
+            <a:avLst/>
+          </a:prstGeom>
+          <a:solidFill>
+            <a:srgbClr val="B45309"/>
+          </a:solidFill>
+          <a:ln w="12700">
+            <a:solidFill>
+              <a:srgbClr val="B45309"/>
+            </a:solidFill>
+            <a:prstDash val="solid"/>
+          </a:ln>
+        </p:spPr>
+      </p:sp>
+      <p:sp>
+        <p:nvSpPr>
+          <p:cNvPr id="19" name="Shape 17"/>
+          <p:cNvSpPr/>
+          <p:nvPr/>
+        </p:nvSpPr>
+        <p:spPr>
+          <a:xfrm>
+            <a:off x="9342831" y="91440"/>
+            <a:ext cx="27432" cy="274320"/>
+          </a:xfrm>
+          <a:prstGeom prst="rect">
+            <a:avLst/>
+          </a:prstGeom>
+          <a:solidFill>
+            <a:srgbClr val="B45309"/>
+          </a:solidFill>
+          <a:ln w="12700">
+            <a:solidFill>
+              <a:srgbClr val="B45309"/>
+            </a:solidFill>
+            <a:prstDash val="solid"/>
+          </a:ln>
+        </p:spPr>
+      </p:sp>
+      <p:pic>
+        <p:nvPicPr>
+          <p:cNvPr id="20" name="Image 0" descr="preencoded.png">    </p:cNvPr>
+          <p:cNvPicPr>
+            <a:picLocks noChangeAspect="1"/>
+          </p:cNvPicPr>
+          <p:nvPr/>
+        </p:nvPicPr>
+        <p:blipFill>
+          <a:blip r:embed="rId1"/>
+          <a:stretch>
+            <a:fillRect/>
+          </a:stretch>
+        </p:blipFill>
+        <p:spPr>
+          <a:xfrm>
+            <a:off x="9415983" y="128016"/>
+            <a:ext cx="201168" cy="201168"/>
+          </a:xfrm>
+          <a:prstGeom prst="rect">
+            <a:avLst/>
+          </a:prstGeom>
+        </p:spPr>
+      </p:pic>
+      <p:sp>
+        <p:nvSpPr>
+          <p:cNvPr id="21" name="Text 18"/>
+          <p:cNvSpPr txBox="1"/>
+          <p:nvPr/>
+        </p:nvSpPr>
+        <p:spPr>
+          <a:xfrm>
+            <a:off x="9672015" y="91440"/>
+            <a:ext cx="1934464" cy="274320"/>
+          </a:xfrm>
+          <a:prstGeom prst="rect">
+            <a:avLst/>
+          </a:prstGeom>
+          <a:noFill/>
+          <a:ln/>
+        </p:spPr>
+        <p:txBody>
+          <a:bodyPr wrap="square" lIns="0" tIns="0" rIns="0" bIns="0" rtlCol="0" anchor="ctr"/>
+          <a:lstStyle/>
+          <a:p>
+            <a:pPr indent="0" marL="0">
+              <a:buNone/>
+            </a:pPr>
+            <a:r>
+              <a:rPr lang="en-US" sz="1100" b="1" dirty="0">
+                <a:solidFill>
+                  <a:srgbClr val="92400E"/>
+                </a:solidFill>
+                <a:latin typeface="Calibri" pitchFamily="34" charset="0"/>
+                <a:ea typeface="Calibri" pitchFamily="34" charset="-122"/>
+                <a:cs typeface="Calibri" pitchFamily="34" charset="-120"/>
+              </a:rPr>
+              <a:t>USE NOW</a:t>
+            </a:r>
+            <a:pPr indent="0" marL="0">
+              <a:buNone/>
+            </a:pPr>
+            <a:r>
+              <a:rPr lang="en-US" sz="1100" dirty="0">
+                <a:solidFill>
+                  <a:srgbClr val="92400E"/>
+                </a:solidFill>
+                <a:latin typeface="Calibri" pitchFamily="34" charset="0"/>
+                <a:ea typeface="Calibri" pitchFamily="34" charset="-122"/>
+                <a:cs typeface="Calibri" pitchFamily="34" charset="-120"/>
+              </a:rPr>
+              <a:t> · the PRG32 tools</a:t>
+            </a:r>
+            <a:endParaRPr lang="en-US" sz="1100" dirty="0"/>
+          </a:p>
+        </p:txBody>
+      </p:sp>
+      <p:sp>
+        <p:nvSpPr>
           <p:cNvPr id="25" name="Slide Number Placeholder 0"/>
           <p:cNvSpPr>
             <a:spLocks noGrp="1"/>
@@ -8492,6 +9669,158 @@
               <a:t>A black screen: check the wiring of the display against the firmware</a:t>
             </a:r>
             <a:endParaRPr lang="en-US" sz="1200" dirty="0"/>
+          </a:p>
+        </p:txBody>
+      </p:sp>
+      <p:sp>
+        <p:nvSpPr>
+          <p:cNvPr id="17" name="Shape 15"/>
+          <p:cNvSpPr/>
+          <p:nvPr/>
+        </p:nvSpPr>
+        <p:spPr>
+          <a:xfrm>
+            <a:off x="9287967" y="91440"/>
+            <a:ext cx="2355088" cy="274320"/>
+          </a:xfrm>
+          <a:prstGeom prst="rect">
+            <a:avLst/>
+          </a:prstGeom>
+          <a:solidFill>
+            <a:srgbClr val="FEF3C7"/>
+          </a:solidFill>
+          <a:ln w="12700">
+            <a:solidFill>
+              <a:srgbClr val="B45309"/>
+            </a:solidFill>
+            <a:prstDash val="solid"/>
+          </a:ln>
+        </p:spPr>
+      </p:sp>
+      <p:sp>
+        <p:nvSpPr>
+          <p:cNvPr id="18" name="Shape 16"/>
+          <p:cNvSpPr/>
+          <p:nvPr/>
+        </p:nvSpPr>
+        <p:spPr>
+          <a:xfrm>
+            <a:off x="9287967" y="91440"/>
+            <a:ext cx="27432" cy="274320"/>
+          </a:xfrm>
+          <a:prstGeom prst="rect">
+            <a:avLst/>
+          </a:prstGeom>
+          <a:solidFill>
+            <a:srgbClr val="B45309"/>
+          </a:solidFill>
+          <a:ln w="12700">
+            <a:solidFill>
+              <a:srgbClr val="B45309"/>
+            </a:solidFill>
+            <a:prstDash val="solid"/>
+          </a:ln>
+        </p:spPr>
+      </p:sp>
+      <p:sp>
+        <p:nvSpPr>
+          <p:cNvPr id="19" name="Shape 17"/>
+          <p:cNvSpPr/>
+          <p:nvPr/>
+        </p:nvSpPr>
+        <p:spPr>
+          <a:xfrm>
+            <a:off x="9342831" y="91440"/>
+            <a:ext cx="27432" cy="274320"/>
+          </a:xfrm>
+          <a:prstGeom prst="rect">
+            <a:avLst/>
+          </a:prstGeom>
+          <a:solidFill>
+            <a:srgbClr val="B45309"/>
+          </a:solidFill>
+          <a:ln w="12700">
+            <a:solidFill>
+              <a:srgbClr val="B45309"/>
+            </a:solidFill>
+            <a:prstDash val="solid"/>
+          </a:ln>
+        </p:spPr>
+      </p:sp>
+      <p:pic>
+        <p:nvPicPr>
+          <p:cNvPr id="20" name="Image 0" descr="preencoded.png">    </p:cNvPr>
+          <p:cNvPicPr>
+            <a:picLocks noChangeAspect="1"/>
+          </p:cNvPicPr>
+          <p:nvPr/>
+        </p:nvPicPr>
+        <p:blipFill>
+          <a:blip r:embed="rId1"/>
+          <a:stretch>
+            <a:fillRect/>
+          </a:stretch>
+        </p:blipFill>
+        <p:spPr>
+          <a:xfrm>
+            <a:off x="9415983" y="128016"/>
+            <a:ext cx="201168" cy="201168"/>
+          </a:xfrm>
+          <a:prstGeom prst="rect">
+            <a:avLst/>
+          </a:prstGeom>
+        </p:spPr>
+      </p:pic>
+      <p:sp>
+        <p:nvSpPr>
+          <p:cNvPr id="21" name="Text 18"/>
+          <p:cNvSpPr txBox="1"/>
+          <p:nvPr/>
+        </p:nvSpPr>
+        <p:spPr>
+          <a:xfrm>
+            <a:off x="9672015" y="91440"/>
+            <a:ext cx="1934464" cy="274320"/>
+          </a:xfrm>
+          <a:prstGeom prst="rect">
+            <a:avLst/>
+          </a:prstGeom>
+          <a:noFill/>
+          <a:ln/>
+        </p:spPr>
+        <p:txBody>
+          <a:bodyPr wrap="square" lIns="0" tIns="0" rIns="0" bIns="0" rtlCol="0" anchor="ctr"/>
+          <a:lstStyle/>
+          <a:p>
+            <a:pPr indent="0" marL="0">
+              <a:buNone/>
+            </a:pPr>
+            <a:r>
+              <a:rPr lang="en-US" sz="1100" b="1" dirty="0">
+                <a:solidFill>
+                  <a:srgbClr val="92400E"/>
+                </a:solidFill>
+                <a:latin typeface="Calibri" pitchFamily="34" charset="0"/>
+                <a:ea typeface="Calibri" pitchFamily="34" charset="-122"/>
+                <a:cs typeface="Calibri" pitchFamily="34" charset="-120"/>
+              </a:rPr>
+              <a:t>USE NOW</a:t>
+            </a:r>
+            <a:pPr indent="0" marL="0">
+              <a:buNone/>
+            </a:pPr>
+            <a:r>
+              <a:rPr lang="en-US" sz="1100" dirty="0">
+                <a:solidFill>
+                  <a:srgbClr val="92400E"/>
+                </a:solidFill>
+                <a:latin typeface="Calibri" pitchFamily="34" charset="0"/>
+                <a:ea typeface="Calibri" pitchFamily="34" charset="-122"/>
+                <a:cs typeface="Calibri" pitchFamily="34" charset="-120"/>
+              </a:rPr>
+              <a:t> · the PRG32 tools</a:t>
+            </a:r>
+            <a:endParaRPr lang="en-US" sz="1100" dirty="0"/>
           </a:p>
         </p:txBody>
       </p:sp>
@@ -9878,6 +11207,158 @@
       </p:graphicFrame>
       <p:sp>
         <p:nvSpPr>
+          <p:cNvPr id="4" name="Shape 1"/>
+          <p:cNvSpPr/>
+          <p:nvPr/>
+        </p:nvSpPr>
+        <p:spPr>
+          <a:xfrm>
+            <a:off x="9287967" y="91440"/>
+            <a:ext cx="2355088" cy="274320"/>
+          </a:xfrm>
+          <a:prstGeom prst="rect">
+            <a:avLst/>
+          </a:prstGeom>
+          <a:solidFill>
+            <a:srgbClr val="FEF3C7"/>
+          </a:solidFill>
+          <a:ln w="12700">
+            <a:solidFill>
+              <a:srgbClr val="B45309"/>
+            </a:solidFill>
+            <a:prstDash val="solid"/>
+          </a:ln>
+        </p:spPr>
+      </p:sp>
+      <p:sp>
+        <p:nvSpPr>
+          <p:cNvPr id="5" name="Shape 2"/>
+          <p:cNvSpPr/>
+          <p:nvPr/>
+        </p:nvSpPr>
+        <p:spPr>
+          <a:xfrm>
+            <a:off x="9287967" y="91440"/>
+            <a:ext cx="27432" cy="274320"/>
+          </a:xfrm>
+          <a:prstGeom prst="rect">
+            <a:avLst/>
+          </a:prstGeom>
+          <a:solidFill>
+            <a:srgbClr val="B45309"/>
+          </a:solidFill>
+          <a:ln w="12700">
+            <a:solidFill>
+              <a:srgbClr val="B45309"/>
+            </a:solidFill>
+            <a:prstDash val="solid"/>
+          </a:ln>
+        </p:spPr>
+      </p:sp>
+      <p:sp>
+        <p:nvSpPr>
+          <p:cNvPr id="6" name="Shape 3"/>
+          <p:cNvSpPr/>
+          <p:nvPr/>
+        </p:nvSpPr>
+        <p:spPr>
+          <a:xfrm>
+            <a:off x="9342831" y="91440"/>
+            <a:ext cx="27432" cy="274320"/>
+          </a:xfrm>
+          <a:prstGeom prst="rect">
+            <a:avLst/>
+          </a:prstGeom>
+          <a:solidFill>
+            <a:srgbClr val="B45309"/>
+          </a:solidFill>
+          <a:ln w="12700">
+            <a:solidFill>
+              <a:srgbClr val="B45309"/>
+            </a:solidFill>
+            <a:prstDash val="solid"/>
+          </a:ln>
+        </p:spPr>
+      </p:sp>
+      <p:pic>
+        <p:nvPicPr>
+          <p:cNvPr id="7" name="Image 0" descr="preencoded.png">    </p:cNvPr>
+          <p:cNvPicPr>
+            <a:picLocks noChangeAspect="1"/>
+          </p:cNvPicPr>
+          <p:nvPr/>
+        </p:nvPicPr>
+        <p:blipFill>
+          <a:blip r:embed="rId1"/>
+          <a:stretch>
+            <a:fillRect/>
+          </a:stretch>
+        </p:blipFill>
+        <p:spPr>
+          <a:xfrm>
+            <a:off x="9415983" y="128016"/>
+            <a:ext cx="201168" cy="201168"/>
+          </a:xfrm>
+          <a:prstGeom prst="rect">
+            <a:avLst/>
+          </a:prstGeom>
+        </p:spPr>
+      </p:pic>
+      <p:sp>
+        <p:nvSpPr>
+          <p:cNvPr id="8" name="Text 4"/>
+          <p:cNvSpPr txBox="1"/>
+          <p:nvPr/>
+        </p:nvSpPr>
+        <p:spPr>
+          <a:xfrm>
+            <a:off x="9672015" y="91440"/>
+            <a:ext cx="1934464" cy="274320"/>
+          </a:xfrm>
+          <a:prstGeom prst="rect">
+            <a:avLst/>
+          </a:prstGeom>
+          <a:noFill/>
+          <a:ln/>
+        </p:spPr>
+        <p:txBody>
+          <a:bodyPr wrap="square" lIns="0" tIns="0" rIns="0" bIns="0" rtlCol="0" anchor="ctr"/>
+          <a:lstStyle/>
+          <a:p>
+            <a:pPr indent="0" marL="0">
+              <a:buNone/>
+            </a:pPr>
+            <a:r>
+              <a:rPr lang="en-US" sz="1100" b="1" dirty="0">
+                <a:solidFill>
+                  <a:srgbClr val="92400E"/>
+                </a:solidFill>
+                <a:latin typeface="Calibri" pitchFamily="34" charset="0"/>
+                <a:ea typeface="Calibri" pitchFamily="34" charset="-122"/>
+                <a:cs typeface="Calibri" pitchFamily="34" charset="-120"/>
+              </a:rPr>
+              <a:t>USE NOW</a:t>
+            </a:r>
+            <a:pPr indent="0" marL="0">
+              <a:buNone/>
+            </a:pPr>
+            <a:r>
+              <a:rPr lang="en-US" sz="1100" dirty="0">
+                <a:solidFill>
+                  <a:srgbClr val="92400E"/>
+                </a:solidFill>
+                <a:latin typeface="Calibri" pitchFamily="34" charset="0"/>
+                <a:ea typeface="Calibri" pitchFamily="34" charset="-122"/>
+                <a:cs typeface="Calibri" pitchFamily="34" charset="-120"/>
+              </a:rPr>
+              <a:t> · the PRG32 tools</a:t>
+            </a:r>
+            <a:endParaRPr lang="en-US" sz="1100" dirty="0"/>
+          </a:p>
+        </p:txBody>
+      </p:sp>
+      <p:sp>
+        <p:nvSpPr>
           <p:cNvPr id="25" name="Slide Number Placeholder 0"/>
           <p:cNvSpPr>
             <a:spLocks noGrp="1"/>
@@ -11375,6 +12856,158 @@
       </p:sp>
       <p:sp>
         <p:nvSpPr>
+          <p:cNvPr id="5" name="Shape 3"/>
+          <p:cNvSpPr/>
+          <p:nvPr/>
+        </p:nvSpPr>
+        <p:spPr>
+          <a:xfrm>
+            <a:off x="9287967" y="91440"/>
+            <a:ext cx="2355088" cy="274320"/>
+          </a:xfrm>
+          <a:prstGeom prst="rect">
+            <a:avLst/>
+          </a:prstGeom>
+          <a:solidFill>
+            <a:srgbClr val="FEF3C7"/>
+          </a:solidFill>
+          <a:ln w="12700">
+            <a:solidFill>
+              <a:srgbClr val="B45309"/>
+            </a:solidFill>
+            <a:prstDash val="solid"/>
+          </a:ln>
+        </p:spPr>
+      </p:sp>
+      <p:sp>
+        <p:nvSpPr>
+          <p:cNvPr id="6" name="Shape 4"/>
+          <p:cNvSpPr/>
+          <p:nvPr/>
+        </p:nvSpPr>
+        <p:spPr>
+          <a:xfrm>
+            <a:off x="9287967" y="91440"/>
+            <a:ext cx="27432" cy="274320"/>
+          </a:xfrm>
+          <a:prstGeom prst="rect">
+            <a:avLst/>
+          </a:prstGeom>
+          <a:solidFill>
+            <a:srgbClr val="B45309"/>
+          </a:solidFill>
+          <a:ln w="12700">
+            <a:solidFill>
+              <a:srgbClr val="B45309"/>
+            </a:solidFill>
+            <a:prstDash val="solid"/>
+          </a:ln>
+        </p:spPr>
+      </p:sp>
+      <p:sp>
+        <p:nvSpPr>
+          <p:cNvPr id="7" name="Shape 5"/>
+          <p:cNvSpPr/>
+          <p:nvPr/>
+        </p:nvSpPr>
+        <p:spPr>
+          <a:xfrm>
+            <a:off x="9342831" y="91440"/>
+            <a:ext cx="27432" cy="274320"/>
+          </a:xfrm>
+          <a:prstGeom prst="rect">
+            <a:avLst/>
+          </a:prstGeom>
+          <a:solidFill>
+            <a:srgbClr val="B45309"/>
+          </a:solidFill>
+          <a:ln w="12700">
+            <a:solidFill>
+              <a:srgbClr val="B45309"/>
+            </a:solidFill>
+            <a:prstDash val="solid"/>
+          </a:ln>
+        </p:spPr>
+      </p:sp>
+      <p:pic>
+        <p:nvPicPr>
+          <p:cNvPr id="8" name="Image 0" descr="preencoded.png">    </p:cNvPr>
+          <p:cNvPicPr>
+            <a:picLocks noChangeAspect="1"/>
+          </p:cNvPicPr>
+          <p:nvPr/>
+        </p:nvPicPr>
+        <p:blipFill>
+          <a:blip r:embed="rId1"/>
+          <a:stretch>
+            <a:fillRect/>
+          </a:stretch>
+        </p:blipFill>
+        <p:spPr>
+          <a:xfrm>
+            <a:off x="9415983" y="128016"/>
+            <a:ext cx="201168" cy="201168"/>
+          </a:xfrm>
+          <a:prstGeom prst="rect">
+            <a:avLst/>
+          </a:prstGeom>
+        </p:spPr>
+      </p:pic>
+      <p:sp>
+        <p:nvSpPr>
+          <p:cNvPr id="9" name="Text 6"/>
+          <p:cNvSpPr txBox="1"/>
+          <p:nvPr/>
+        </p:nvSpPr>
+        <p:spPr>
+          <a:xfrm>
+            <a:off x="9672015" y="91440"/>
+            <a:ext cx="1934464" cy="274320"/>
+          </a:xfrm>
+          <a:prstGeom prst="rect">
+            <a:avLst/>
+          </a:prstGeom>
+          <a:noFill/>
+          <a:ln/>
+        </p:spPr>
+        <p:txBody>
+          <a:bodyPr wrap="square" lIns="0" tIns="0" rIns="0" bIns="0" rtlCol="0" anchor="ctr"/>
+          <a:lstStyle/>
+          <a:p>
+            <a:pPr indent="0" marL="0">
+              <a:buNone/>
+            </a:pPr>
+            <a:r>
+              <a:rPr lang="en-US" sz="1100" b="1" dirty="0">
+                <a:solidFill>
+                  <a:srgbClr val="92400E"/>
+                </a:solidFill>
+                <a:latin typeface="Calibri" pitchFamily="34" charset="0"/>
+                <a:ea typeface="Calibri" pitchFamily="34" charset="-122"/>
+                <a:cs typeface="Calibri" pitchFamily="34" charset="-120"/>
+              </a:rPr>
+              <a:t>USE NOW</a:t>
+            </a:r>
+            <a:pPr indent="0" marL="0">
+              <a:buNone/>
+            </a:pPr>
+            <a:r>
+              <a:rPr lang="en-US" sz="1100" dirty="0">
+                <a:solidFill>
+                  <a:srgbClr val="92400E"/>
+                </a:solidFill>
+                <a:latin typeface="Calibri" pitchFamily="34" charset="0"/>
+                <a:ea typeface="Calibri" pitchFamily="34" charset="-122"/>
+                <a:cs typeface="Calibri" pitchFamily="34" charset="-120"/>
+              </a:rPr>
+              <a:t> · the PRG32 tools</a:t>
+            </a:r>
+            <a:endParaRPr lang="en-US" sz="1100" dirty="0"/>
+          </a:p>
+        </p:txBody>
+      </p:sp>
+      <p:sp>
+        <p:nvSpPr>
           <p:cNvPr id="25" name="Slide Number Placeholder 0"/>
           <p:cNvSpPr>
             <a:spLocks noGrp="1"/>
@@ -12262,6 +13895,133 @@
       </p:sp>
       <p:sp>
         <p:nvSpPr>
+          <p:cNvPr id="17" name="Shape 15"/>
+          <p:cNvSpPr/>
+          <p:nvPr/>
+        </p:nvSpPr>
+        <p:spPr>
+          <a:xfrm>
+            <a:off x="7631125" y="91440"/>
+            <a:ext cx="4011930" cy="274320"/>
+          </a:xfrm>
+          <a:prstGeom prst="rect">
+            <a:avLst/>
+          </a:prstGeom>
+          <a:solidFill>
+            <a:srgbClr val="E0F2FE"/>
+          </a:solidFill>
+          <a:ln w="12700">
+            <a:solidFill>
+              <a:srgbClr val="0369A1"/>
+            </a:solidFill>
+            <a:prstDash val="solid"/>
+          </a:ln>
+        </p:spPr>
+      </p:sp>
+      <p:sp>
+        <p:nvSpPr>
+          <p:cNvPr id="18" name="Shape 16"/>
+          <p:cNvSpPr/>
+          <p:nvPr/>
+        </p:nvSpPr>
+        <p:spPr>
+          <a:xfrm>
+            <a:off x="7631125" y="91440"/>
+            <a:ext cx="73152" cy="274320"/>
+          </a:xfrm>
+          <a:prstGeom prst="rect">
+            <a:avLst/>
+          </a:prstGeom>
+          <a:solidFill>
+            <a:srgbClr val="0369A1"/>
+          </a:solidFill>
+          <a:ln w="12700">
+            <a:solidFill>
+              <a:srgbClr val="0369A1"/>
+            </a:solidFill>
+            <a:prstDash val="solid"/>
+          </a:ln>
+        </p:spPr>
+      </p:sp>
+      <p:pic>
+        <p:nvPicPr>
+          <p:cNvPr id="19" name="Image 0" descr="preencoded.png">    </p:cNvPr>
+          <p:cNvPicPr>
+            <a:picLocks noChangeAspect="1"/>
+          </p:cNvPicPr>
+          <p:nvPr/>
+        </p:nvPicPr>
+        <p:blipFill>
+          <a:blip r:embed="rId1"/>
+          <a:stretch>
+            <a:fillRect/>
+          </a:stretch>
+        </p:blipFill>
+        <p:spPr>
+          <a:xfrm>
+            <a:off x="7759141" y="128016"/>
+            <a:ext cx="201168" cy="201168"/>
+          </a:xfrm>
+          <a:prstGeom prst="rect">
+            <a:avLst/>
+          </a:prstGeom>
+        </p:spPr>
+      </p:pic>
+      <p:sp>
+        <p:nvSpPr>
+          <p:cNvPr id="20" name="Text 17"/>
+          <p:cNvSpPr txBox="1"/>
+          <p:nvPr/>
+        </p:nvSpPr>
+        <p:spPr>
+          <a:xfrm>
+            <a:off x="8015173" y="91440"/>
+            <a:ext cx="3591306" cy="274320"/>
+          </a:xfrm>
+          <a:prstGeom prst="rect">
+            <a:avLst/>
+          </a:prstGeom>
+          <a:noFill/>
+          <a:ln/>
+        </p:spPr>
+        <p:txBody>
+          <a:bodyPr wrap="square" lIns="0" tIns="0" rIns="0" bIns="0" rtlCol="0" anchor="ctr"/>
+          <a:lstStyle/>
+          <a:p>
+            <a:pPr indent="0" marL="0">
+              <a:buNone/>
+            </a:pPr>
+            <a:r>
+              <a:rPr lang="en-US" sz="1100" b="1" dirty="0">
+                <a:solidFill>
+                  <a:srgbClr val="075985"/>
+                </a:solidFill>
+                <a:latin typeface="Calibri" pitchFamily="34" charset="0"/>
+                <a:ea typeface="Calibri" pitchFamily="34" charset="-122"/>
+                <a:cs typeface="Calibri" pitchFamily="34" charset="-120"/>
+              </a:rPr>
+              <a:t>UNDERSTAND NOW</a:t>
+            </a:r>
+            <a:pPr indent="0" marL="0">
+              <a:buNone/>
+            </a:pPr>
+            <a:r>
+              <a:rPr lang="en-US" sz="1100" dirty="0">
+                <a:solidFill>
+                  <a:srgbClr val="075985"/>
+                </a:solidFill>
+                <a:latin typeface="Calibri" pitchFamily="34" charset="0"/>
+                <a:ea typeface="Calibri" pitchFamily="34" charset="-122"/>
+                <a:cs typeface="Calibri" pitchFamily="34" charset="-120"/>
+              </a:rPr>
+              <a:t> · the init, update, draw contract</a:t>
+            </a:r>
+            <a:endParaRPr lang="en-US" sz="1100" dirty="0"/>
+          </a:p>
+        </p:txBody>
+      </p:sp>
+      <p:sp>
+        <p:nvSpPr>
           <p:cNvPr id="25" name="Slide Number Placeholder 0"/>
           <p:cNvSpPr>
             <a:spLocks noGrp="1"/>
@@ -13199,6 +14959,133 @@
       </p:sp>
       <p:sp>
         <p:nvSpPr>
+          <p:cNvPr id="17" name="Shape 15"/>
+          <p:cNvSpPr/>
+          <p:nvPr/>
+        </p:nvSpPr>
+        <p:spPr>
+          <a:xfrm>
+            <a:off x="8353374" y="91440"/>
+            <a:ext cx="3289681" cy="274320"/>
+          </a:xfrm>
+          <a:prstGeom prst="rect">
+            <a:avLst/>
+          </a:prstGeom>
+          <a:solidFill>
+            <a:srgbClr val="E0F2FE"/>
+          </a:solidFill>
+          <a:ln w="12700">
+            <a:solidFill>
+              <a:srgbClr val="0369A1"/>
+            </a:solidFill>
+            <a:prstDash val="solid"/>
+          </a:ln>
+        </p:spPr>
+      </p:sp>
+      <p:sp>
+        <p:nvSpPr>
+          <p:cNvPr id="18" name="Shape 16"/>
+          <p:cNvSpPr/>
+          <p:nvPr/>
+        </p:nvSpPr>
+        <p:spPr>
+          <a:xfrm>
+            <a:off x="8353374" y="91440"/>
+            <a:ext cx="73152" cy="274320"/>
+          </a:xfrm>
+          <a:prstGeom prst="rect">
+            <a:avLst/>
+          </a:prstGeom>
+          <a:solidFill>
+            <a:srgbClr val="0369A1"/>
+          </a:solidFill>
+          <a:ln w="12700">
+            <a:solidFill>
+              <a:srgbClr val="0369A1"/>
+            </a:solidFill>
+            <a:prstDash val="solid"/>
+          </a:ln>
+        </p:spPr>
+      </p:sp>
+      <p:pic>
+        <p:nvPicPr>
+          <p:cNvPr id="19" name="Image 0" descr="preencoded.png">    </p:cNvPr>
+          <p:cNvPicPr>
+            <a:picLocks noChangeAspect="1"/>
+          </p:cNvPicPr>
+          <p:nvPr/>
+        </p:nvPicPr>
+        <p:blipFill>
+          <a:blip r:embed="rId1"/>
+          <a:stretch>
+            <a:fillRect/>
+          </a:stretch>
+        </p:blipFill>
+        <p:spPr>
+          <a:xfrm>
+            <a:off x="8481390" y="128016"/>
+            <a:ext cx="201168" cy="201168"/>
+          </a:xfrm>
+          <a:prstGeom prst="rect">
+            <a:avLst/>
+          </a:prstGeom>
+        </p:spPr>
+      </p:pic>
+      <p:sp>
+        <p:nvSpPr>
+          <p:cNvPr id="20" name="Text 17"/>
+          <p:cNvSpPr txBox="1"/>
+          <p:nvPr/>
+        </p:nvSpPr>
+        <p:spPr>
+          <a:xfrm>
+            <a:off x="8737422" y="91440"/>
+            <a:ext cx="2869057" cy="274320"/>
+          </a:xfrm>
+          <a:prstGeom prst="rect">
+            <a:avLst/>
+          </a:prstGeom>
+          <a:noFill/>
+          <a:ln/>
+        </p:spPr>
+        <p:txBody>
+          <a:bodyPr wrap="square" lIns="0" tIns="0" rIns="0" bIns="0" rtlCol="0" anchor="ctr"/>
+          <a:lstStyle/>
+          <a:p>
+            <a:pPr indent="0" marL="0">
+              <a:buNone/>
+            </a:pPr>
+            <a:r>
+              <a:rPr lang="en-US" sz="1100" b="1" dirty="0">
+                <a:solidFill>
+                  <a:srgbClr val="075985"/>
+                </a:solidFill>
+                <a:latin typeface="Calibri" pitchFamily="34" charset="0"/>
+                <a:ea typeface="Calibri" pitchFamily="34" charset="-122"/>
+                <a:cs typeface="Calibri" pitchFamily="34" charset="-120"/>
+              </a:rPr>
+              <a:t>UNDERSTAND NOW</a:t>
+            </a:r>
+            <a:pPr indent="0" marL="0">
+              <a:buNone/>
+            </a:pPr>
+            <a:r>
+              <a:rPr lang="en-US" sz="1100" dirty="0">
+                <a:solidFill>
+                  <a:srgbClr val="075985"/>
+                </a:solidFill>
+                <a:latin typeface="Calibri" pitchFamily="34" charset="0"/>
+                <a:ea typeface="Calibri" pitchFamily="34" charset="-122"/>
+                <a:cs typeface="Calibri" pitchFamily="34" charset="-120"/>
+              </a:rPr>
+              <a:t> · a colour is a number</a:t>
+            </a:r>
+            <a:endParaRPr lang="en-US" sz="1100" dirty="0"/>
+          </a:p>
+        </p:txBody>
+      </p:sp>
+      <p:sp>
+        <p:nvSpPr>
           <p:cNvPr id="25" name="Slide Number Placeholder 0"/>
           <p:cNvSpPr>
             <a:spLocks noGrp="1"/>
@@ -13862,6 +15749,133 @@
       </p:sp>
       <p:sp>
         <p:nvSpPr>
+          <p:cNvPr id="14" name="Shape 12"/>
+          <p:cNvSpPr/>
+          <p:nvPr/>
+        </p:nvSpPr>
+        <p:spPr>
+          <a:xfrm>
+            <a:off x="8287715" y="91440"/>
+            <a:ext cx="3355340" cy="274320"/>
+          </a:xfrm>
+          <a:prstGeom prst="rect">
+            <a:avLst/>
+          </a:prstGeom>
+          <a:solidFill>
+            <a:srgbClr val="E0F2FE"/>
+          </a:solidFill>
+          <a:ln w="12700">
+            <a:solidFill>
+              <a:srgbClr val="0369A1"/>
+            </a:solidFill>
+            <a:prstDash val="solid"/>
+          </a:ln>
+        </p:spPr>
+      </p:sp>
+      <p:sp>
+        <p:nvSpPr>
+          <p:cNvPr id="15" name="Shape 13"/>
+          <p:cNvSpPr/>
+          <p:nvPr/>
+        </p:nvSpPr>
+        <p:spPr>
+          <a:xfrm>
+            <a:off x="8287715" y="91440"/>
+            <a:ext cx="73152" cy="274320"/>
+          </a:xfrm>
+          <a:prstGeom prst="rect">
+            <a:avLst/>
+          </a:prstGeom>
+          <a:solidFill>
+            <a:srgbClr val="0369A1"/>
+          </a:solidFill>
+          <a:ln w="12700">
+            <a:solidFill>
+              <a:srgbClr val="0369A1"/>
+            </a:solidFill>
+            <a:prstDash val="solid"/>
+          </a:ln>
+        </p:spPr>
+      </p:sp>
+      <p:pic>
+        <p:nvPicPr>
+          <p:cNvPr id="16" name="Image 0" descr="preencoded.png">    </p:cNvPr>
+          <p:cNvPicPr>
+            <a:picLocks noChangeAspect="1"/>
+          </p:cNvPicPr>
+          <p:nvPr/>
+        </p:nvPicPr>
+        <p:blipFill>
+          <a:blip r:embed="rId1"/>
+          <a:stretch>
+            <a:fillRect/>
+          </a:stretch>
+        </p:blipFill>
+        <p:spPr>
+          <a:xfrm>
+            <a:off x="8415731" y="128016"/>
+            <a:ext cx="201168" cy="201168"/>
+          </a:xfrm>
+          <a:prstGeom prst="rect">
+            <a:avLst/>
+          </a:prstGeom>
+        </p:spPr>
+      </p:pic>
+      <p:sp>
+        <p:nvSpPr>
+          <p:cNvPr id="17" name="Text 14"/>
+          <p:cNvSpPr txBox="1"/>
+          <p:nvPr/>
+        </p:nvSpPr>
+        <p:spPr>
+          <a:xfrm>
+            <a:off x="8671763" y="91440"/>
+            <a:ext cx="2934716" cy="274320"/>
+          </a:xfrm>
+          <a:prstGeom prst="rect">
+            <a:avLst/>
+          </a:prstGeom>
+          <a:noFill/>
+          <a:ln/>
+        </p:spPr>
+        <p:txBody>
+          <a:bodyPr wrap="square" lIns="0" tIns="0" rIns="0" bIns="0" rtlCol="0" anchor="ctr"/>
+          <a:lstStyle/>
+          <a:p>
+            <a:pPr indent="0" marL="0">
+              <a:buNone/>
+            </a:pPr>
+            <a:r>
+              <a:rPr lang="en-US" sz="1100" b="1" dirty="0">
+                <a:solidFill>
+                  <a:srgbClr val="075985"/>
+                </a:solidFill>
+                <a:latin typeface="Calibri" pitchFamily="34" charset="0"/>
+                <a:ea typeface="Calibri" pitchFamily="34" charset="-122"/>
+                <a:cs typeface="Calibri" pitchFamily="34" charset="-120"/>
+              </a:rPr>
+              <a:t>UNDERSTAND NOW</a:t>
+            </a:r>
+            <a:pPr indent="0" marL="0">
+              <a:buNone/>
+            </a:pPr>
+            <a:r>
+              <a:rPr lang="en-US" sz="1100" dirty="0">
+                <a:solidFill>
+                  <a:srgbClr val="075985"/>
+                </a:solidFill>
+                <a:latin typeface="Calibri" pitchFamily="34" charset="0"/>
+                <a:ea typeface="Calibri" pitchFamily="34" charset="-122"/>
+                <a:cs typeface="Calibri" pitchFamily="34" charset="-120"/>
+              </a:rPr>
+              <a:t> · .text, .rodata, .data</a:t>
+            </a:r>
+            <a:endParaRPr lang="en-US" sz="1100" dirty="0"/>
+          </a:p>
+        </p:txBody>
+      </p:sp>
+      <p:sp>
+        <p:nvSpPr>
           <p:cNvPr id="25" name="Slide Number Placeholder 0"/>
           <p:cNvSpPr>
             <a:spLocks noGrp="1"/>
@@ -14689,6 +16703,133 @@
       </p:sp>
       <p:sp>
         <p:nvSpPr>
+          <p:cNvPr id="17" name="Shape 15"/>
+          <p:cNvSpPr/>
+          <p:nvPr/>
+        </p:nvSpPr>
+        <p:spPr>
+          <a:xfrm>
+            <a:off x="7893761" y="91440"/>
+            <a:ext cx="3749294" cy="274320"/>
+          </a:xfrm>
+          <a:prstGeom prst="rect">
+            <a:avLst/>
+          </a:prstGeom>
+          <a:solidFill>
+            <a:srgbClr val="E0F2FE"/>
+          </a:solidFill>
+          <a:ln w="12700">
+            <a:solidFill>
+              <a:srgbClr val="0369A1"/>
+            </a:solidFill>
+            <a:prstDash val="solid"/>
+          </a:ln>
+        </p:spPr>
+      </p:sp>
+      <p:sp>
+        <p:nvSpPr>
+          <p:cNvPr id="18" name="Shape 16"/>
+          <p:cNvSpPr/>
+          <p:nvPr/>
+        </p:nvSpPr>
+        <p:spPr>
+          <a:xfrm>
+            <a:off x="7893761" y="91440"/>
+            <a:ext cx="73152" cy="274320"/>
+          </a:xfrm>
+          <a:prstGeom prst="rect">
+            <a:avLst/>
+          </a:prstGeom>
+          <a:solidFill>
+            <a:srgbClr val="0369A1"/>
+          </a:solidFill>
+          <a:ln w="12700">
+            <a:solidFill>
+              <a:srgbClr val="0369A1"/>
+            </a:solidFill>
+            <a:prstDash val="solid"/>
+          </a:ln>
+        </p:spPr>
+      </p:sp>
+      <p:pic>
+        <p:nvPicPr>
+          <p:cNvPr id="19" name="Image 0" descr="preencoded.png">    </p:cNvPr>
+          <p:cNvPicPr>
+            <a:picLocks noChangeAspect="1"/>
+          </p:cNvPicPr>
+          <p:nvPr/>
+        </p:nvPicPr>
+        <p:blipFill>
+          <a:blip r:embed="rId1"/>
+          <a:stretch>
+            <a:fillRect/>
+          </a:stretch>
+        </p:blipFill>
+        <p:spPr>
+          <a:xfrm>
+            <a:off x="8021777" y="128016"/>
+            <a:ext cx="201168" cy="201168"/>
+          </a:xfrm>
+          <a:prstGeom prst="rect">
+            <a:avLst/>
+          </a:prstGeom>
+        </p:spPr>
+      </p:pic>
+      <p:sp>
+        <p:nvSpPr>
+          <p:cNvPr id="20" name="Text 17"/>
+          <p:cNvSpPr txBox="1"/>
+          <p:nvPr/>
+        </p:nvSpPr>
+        <p:spPr>
+          <a:xfrm>
+            <a:off x="8277809" y="91440"/>
+            <a:ext cx="3328670" cy="274320"/>
+          </a:xfrm>
+          <a:prstGeom prst="rect">
+            <a:avLst/>
+          </a:prstGeom>
+          <a:noFill/>
+          <a:ln/>
+        </p:spPr>
+        <p:txBody>
+          <a:bodyPr wrap="square" lIns="0" tIns="0" rIns="0" bIns="0" rtlCol="0" anchor="ctr"/>
+          <a:lstStyle/>
+          <a:p>
+            <a:pPr indent="0" marL="0">
+              <a:buNone/>
+            </a:pPr>
+            <a:r>
+              <a:rPr lang="en-US" sz="1100" b="1" dirty="0">
+                <a:solidFill>
+                  <a:srgbClr val="075985"/>
+                </a:solidFill>
+                <a:latin typeface="Calibri" pitchFamily="34" charset="0"/>
+                <a:ea typeface="Calibri" pitchFamily="34" charset="-122"/>
+                <a:cs typeface="Calibri" pitchFamily="34" charset="-120"/>
+              </a:rPr>
+              <a:t>UNDERSTAND NOW</a:t>
+            </a:r>
+            <a:pPr indent="0" marL="0">
+              <a:buNone/>
+            </a:pPr>
+            <a:r>
+              <a:rPr lang="en-US" sz="1100" dirty="0">
+                <a:solidFill>
+                  <a:srgbClr val="075985"/>
+                </a:solidFill>
+                <a:latin typeface="Calibri" pitchFamily="34" charset="0"/>
+                <a:ea typeface="Calibri" pitchFamily="34" charset="-122"/>
+                <a:cs typeface="Calibri" pitchFamily="34" charset="-120"/>
+              </a:rPr>
+              <a:t> · address, value, load, store</a:t>
+            </a:r>
+            <a:endParaRPr lang="en-US" sz="1100" dirty="0"/>
+          </a:p>
+        </p:txBody>
+      </p:sp>
+      <p:sp>
+        <p:nvSpPr>
           <p:cNvPr id="25" name="Slide Number Placeholder 0"/>
           <p:cNvSpPr>
             <a:spLocks noGrp="1"/>
@@ -15822,6 +17963,133 @@
               <a:t>draw makes calls, so it saves ra in a stack frame</a:t>
             </a:r>
             <a:endParaRPr lang="en-US" sz="1200" dirty="0"/>
+          </a:p>
+        </p:txBody>
+      </p:sp>
+      <p:sp>
+        <p:nvSpPr>
+          <p:cNvPr id="17" name="Shape 15"/>
+          <p:cNvSpPr/>
+          <p:nvPr/>
+        </p:nvSpPr>
+        <p:spPr>
+          <a:xfrm>
+            <a:off x="8681669" y="91440"/>
+            <a:ext cx="2961386" cy="274320"/>
+          </a:xfrm>
+          <a:prstGeom prst="rect">
+            <a:avLst/>
+          </a:prstGeom>
+          <a:solidFill>
+            <a:srgbClr val="E0F2FE"/>
+          </a:solidFill>
+          <a:ln w="12700">
+            <a:solidFill>
+              <a:srgbClr val="0369A1"/>
+            </a:solidFill>
+            <a:prstDash val="solid"/>
+          </a:ln>
+        </p:spPr>
+      </p:sp>
+      <p:sp>
+        <p:nvSpPr>
+          <p:cNvPr id="18" name="Shape 16"/>
+          <p:cNvSpPr/>
+          <p:nvPr/>
+        </p:nvSpPr>
+        <p:spPr>
+          <a:xfrm>
+            <a:off x="8681669" y="91440"/>
+            <a:ext cx="73152" cy="274320"/>
+          </a:xfrm>
+          <a:prstGeom prst="rect">
+            <a:avLst/>
+          </a:prstGeom>
+          <a:solidFill>
+            <a:srgbClr val="0369A1"/>
+          </a:solidFill>
+          <a:ln w="12700">
+            <a:solidFill>
+              <a:srgbClr val="0369A1"/>
+            </a:solidFill>
+            <a:prstDash val="solid"/>
+          </a:ln>
+        </p:spPr>
+      </p:sp>
+      <p:pic>
+        <p:nvPicPr>
+          <p:cNvPr id="19" name="Image 0" descr="preencoded.png">    </p:cNvPr>
+          <p:cNvPicPr>
+            <a:picLocks noChangeAspect="1"/>
+          </p:cNvPicPr>
+          <p:nvPr/>
+        </p:nvPicPr>
+        <p:blipFill>
+          <a:blip r:embed="rId1"/>
+          <a:stretch>
+            <a:fillRect/>
+          </a:stretch>
+        </p:blipFill>
+        <p:spPr>
+          <a:xfrm>
+            <a:off x="8809685" y="128016"/>
+            <a:ext cx="201168" cy="201168"/>
+          </a:xfrm>
+          <a:prstGeom prst="rect">
+            <a:avLst/>
+          </a:prstGeom>
+        </p:spPr>
+      </p:pic>
+      <p:sp>
+        <p:nvSpPr>
+          <p:cNvPr id="20" name="Text 17"/>
+          <p:cNvSpPr txBox="1"/>
+          <p:nvPr/>
+        </p:nvSpPr>
+        <p:spPr>
+          <a:xfrm>
+            <a:off x="9065717" y="91440"/>
+            <a:ext cx="2540762" cy="274320"/>
+          </a:xfrm>
+          <a:prstGeom prst="rect">
+            <a:avLst/>
+          </a:prstGeom>
+          <a:noFill/>
+          <a:ln/>
+        </p:spPr>
+        <p:txBody>
+          <a:bodyPr wrap="square" lIns="0" tIns="0" rIns="0" bIns="0" rtlCol="0" anchor="ctr"/>
+          <a:lstStyle/>
+          <a:p>
+            <a:pPr indent="0" marL="0">
+              <a:buNone/>
+            </a:pPr>
+            <a:r>
+              <a:rPr lang="en-US" sz="1100" b="1" dirty="0">
+                <a:solidFill>
+                  <a:srgbClr val="075985"/>
+                </a:solidFill>
+                <a:latin typeface="Calibri" pitchFamily="34" charset="0"/>
+                <a:ea typeface="Calibri" pitchFamily="34" charset="-122"/>
+                <a:cs typeface="Calibri" pitchFamily="34" charset="-120"/>
+              </a:rPr>
+              <a:t>UNDERSTAND NOW</a:t>
+            </a:r>
+            <a:pPr indent="0" marL="0">
+              <a:buNone/>
+            </a:pPr>
+            <a:r>
+              <a:rPr lang="en-US" sz="1100" dirty="0">
+                <a:solidFill>
+                  <a:srgbClr val="075985"/>
+                </a:solidFill>
+                <a:latin typeface="Calibri" pitchFamily="34" charset="0"/>
+                <a:ea typeface="Calibri" pitchFamily="34" charset="-122"/>
+                <a:cs typeface="Calibri" pitchFamily="34" charset="-120"/>
+              </a:rPr>
+              <a:t> · why ra is saved</a:t>
+            </a:r>
+            <a:endParaRPr lang="en-US" sz="1100" dirty="0"/>
           </a:p>
         </p:txBody>
       </p:sp>

--- a/en/slides/07-Computer_Architecture-Verm1_Part_1-Code.pptx
+++ b/en/slides/07-Computer_Architecture-Verm1_Part_1-Code.pptx
@@ -124,19 +124,19 @@
   <p:extLst>
     <p:ext uri="{521415D9-36F7-43E2-AB2F-B90AF26B5E84}">
       <p14:sectionLst xmlns:p14="http://schemas.microsoft.com/office/powerpoint/2010/main">
-        <p14:section name="Opening" id="{1debacec-33b0-409e-e8a7-a83894af8846}">
+        <p14:section name="Opening" id="{9e5edf6c-539e-9837-1946-08b30e0b301f}">
           <p14:sldIdLst>
             <p14:sldId id="256"/>
             <p14:sldId id="257"/>
           </p14:sldIdLst>
         </p14:section>
-        <p14:section name="Step 0: the working loop" id="{4ada3058-22fd-5eb1-748c-c0388aea1be0}">
+        <p14:section name="Step 0: the working loop" id="{c2893532-79e8-f408-ae81-6352405dcde3}">
           <p14:sldIdLst>
             <p14:sldId id="258"/>
             <p14:sldId id="259"/>
           </p14:sldIdLst>
         </p14:section>
-        <p14:section name="Step 2: a grid and a head" id="{99678840-ef0c-5bc5-a2dd-d1a3f4458363}">
+        <p14:section name="Step 2: a grid and a head" id="{339d4fd2-f1db-aaa1-e3fe-5bf3714baa2d}">
           <p14:sldIdLst>
             <p14:sldId id="260"/>
             <p14:sldId id="261"/>
@@ -145,18 +145,18 @@
             <p14:sldId id="264"/>
           </p14:sldIdLst>
         </p14:section>
-        <p14:section name="Step 3: movement" id="{b302ed3a-2b3f-3333-e8e0-4840bd21e721}">
+        <p14:section name="Step 3: movement" id="{8ca37873-e04a-e306-034b-bf4b3fcd2482}">
           <p14:sldIdLst>
             <p14:sldId id="265"/>
             <p14:sldId id="266"/>
           </p14:sldIdLst>
         </p14:section>
-        <p14:section name="Step 4: look inside with PRG32-QT" id="{1bc8a331-ab04-860a-df30-d5e6be925477}">
+        <p14:section name="Step 4: look inside with PRG32-QT" id="{292cd521-ea32-e31f-4f96-2e14950eeefc}">
           <p14:sldIdLst>
             <p14:sldId id="267"/>
           </p14:sldIdLst>
         </p14:section>
-        <p14:section name="Run it and test it" id="{00e009f0-8a27-f5b5-ddf0-a21169fbe66f}">
+        <p14:section name="Run it and test it" id="{e6de648e-140d-7eb4-e20b-6972057d12a4}">
           <p14:sldIdLst>
             <p14:sldId id="268"/>
             <p14:sldId id="269"/>
@@ -165,7 +165,7 @@
             <p14:sldId id="272"/>
           </p14:sldIdLst>
         </p14:section>
-        <p14:section name="Exercises" id="{cfada311-0664-2497-283e-16adf5735ce4}">
+        <p14:section name="Exercises" id="{0ad60507-13fc-3b02-5855-40b0b87a98b0}">
           <p14:sldIdLst>
             <p14:sldId id="273"/>
           </p14:sldIdLst>
@@ -845,7 +845,7 @@
               <a:rPr lang="en-US" dirty="0"/>
               <a:t>The debugger does not show your source: it shows what the assembler produced. Names have disappeared: labels have become addresses and SPEED_Q8 has become the number 40. Pseudo-instructions are expanded: la is auipc followed by addi, li is an addi from zero, ret is a jump to ra. Some instructions begin with c.: they are the compressed, 16-bit forms of the same instructions, the C in RV32IMAC. Recognising your own program in this listing is a skill that grows with practice.
 UNDERSTAND NOW: pseudo-instructions. UNDERSTAND LATER: instruction formats (studied in Lecture 19).
-For the lecturer: Disassembly of verm1_update from verm1/verm1_part1.S (objdump, rv32imac), abridged; the exact offsets depend on the build. Instruction formats and compressed instructions are the subject of Lecture 19.</a:t>
+For the lecturer: Disassembly of verm1_update from verm1/verm1_part1.S (objdump, rv32imac), abridged; the exact offsets depend on the build. Instruction formats are the subject of Lecture 19; the compressed forms are only named there, and listed in Appendix A of the textbook.</a:t>
             </a:r>
             <a:endParaRPr lang="en-US" dirty="0"/>
           </a:p>
